--- a/samples/en_life.pptx
+++ b/samples/en_life.pptx
@@ -8,7 +8,11 @@
     <p:sldId id="256" r:id="rId7"/>
     <p:sldId id="257" r:id="rId8"/>
     <p:sldId id="258" r:id="rId9"/>
-    <p:sldId id="259" r:id="rId11"/>
+    <p:sldId id="259" r:id="rId10"/>
+    <p:sldId id="260" r:id="rId11"/>
+    <p:sldId id="261" r:id="rId12"/>
+    <p:sldId id="262" r:id="rId13"/>
+    <p:sldId id="263" r:id="rId14"/>
   </p:sldIdLst>
   <p:sldSz cx="9144000" cy="6858000" type="screen4x3"/>
   <p:notesSz cx="6858000" cy="9144000"/>
@@ -108,426 +112,6 @@
     </a:lvl9pPr>
   </p:defaultTextStyle>
 </p:presentation>
-</file>
-
-<file path=ppt/notesMasters/notesMaster1.xml><?xml version="1.0" encoding="utf-8"?>
-<p:notesMaster xmlns:a="http://schemas.openxmlformats.org/drawingml/2006/main" xmlns:p="http://schemas.openxmlformats.org/presentationml/2006/main" xmlns:r="http://schemas.openxmlformats.org/officeDocument/2006/relationships">
-  <p:cSld>
-    <p:bg>
-      <p:bgRef idx="1001">
-        <a:schemeClr val="bg1"/>
-      </p:bgRef>
-    </p:bg>
-    <p:spTree>
-      <p:nvGrpSpPr>
-        <p:cNvPr id="1" name=""/>
-        <p:cNvGrpSpPr/>
-        <p:nvPr/>
-      </p:nvGrpSpPr>
-      <p:grpSpPr>
-        <a:xfrm>
-          <a:off x="0" y="0"/>
-          <a:ext cx="0" cy="0"/>
-          <a:chOff x="0" y="0"/>
-          <a:chExt cx="0" cy="0"/>
-        </a:xfrm>
-      </p:grpSpPr>
-      <p:sp>
-        <p:nvSpPr>
-          <p:cNvPr id="2" name="Header Placeholder 1"/>
-          <p:cNvSpPr>
-            <a:spLocks noGrp="1"/>
-          </p:cNvSpPr>
-          <p:nvPr>
-            <p:ph type="hdr" sz="quarter"/>
-          </p:nvPr>
-        </p:nvSpPr>
-        <p:spPr>
-          <a:xfrm>
-            <a:off x="0" y="0"/>
-            <a:ext cx="2971800" cy="457200"/>
-          </a:xfrm>
-          <a:prstGeom prst="rect">
-            <a:avLst/>
-          </a:prstGeom>
-        </p:spPr>
-        <p:txBody>
-          <a:bodyPr vert="horz" lIns="91440" tIns="45720" rIns="91440" bIns="45720" rtlCol="0"/>
-          <a:lstStyle>
-            <a:lvl1pPr algn="l">
-              <a:defRPr sz="1200"/>
-            </a:lvl1pPr>
-          </a:lstStyle>
-          <a:p>
-            <a:endParaRPr lang="en-US"/>
-          </a:p>
-        </p:txBody>
-      </p:sp>
-      <p:sp>
-        <p:nvSpPr>
-          <p:cNvPr id="3" name="Date Placeholder 2"/>
-          <p:cNvSpPr>
-            <a:spLocks noGrp="1"/>
-          </p:cNvSpPr>
-          <p:nvPr>
-            <p:ph type="dt" idx="1"/>
-          </p:nvPr>
-        </p:nvSpPr>
-        <p:spPr>
-          <a:xfrm>
-            <a:off x="3884613" y="0"/>
-            <a:ext cx="2971800" cy="457200"/>
-          </a:xfrm>
-          <a:prstGeom prst="rect">
-            <a:avLst/>
-          </a:prstGeom>
-        </p:spPr>
-        <p:txBody>
-          <a:bodyPr vert="horz" lIns="91440" tIns="45720" rIns="91440" bIns="45720" rtlCol="0"/>
-          <a:lstStyle>
-            <a:lvl1pPr algn="r">
-              <a:defRPr sz="1200"/>
-            </a:lvl1pPr>
-          </a:lstStyle>
-          <a:p>
-            <a:fld id="{0F89C1C7-3DCD-1040-A9CF-14679D8B5DDD}" type="datetimeFigureOut">
-              <a:rPr lang="en-US" smtClean="0"/>
-              <a:t>10/17/16</a:t>
-            </a:fld>
-            <a:endParaRPr lang="en-US"/>
-          </a:p>
-        </p:txBody>
-      </p:sp>
-      <p:sp>
-        <p:nvSpPr>
-          <p:cNvPr id="4" name="Slide Image Placeholder 3"/>
-          <p:cNvSpPr>
-            <a:spLocks noGrp="1" noRot="1" noChangeAspect="1"/>
-          </p:cNvSpPr>
-          <p:nvPr>
-            <p:ph type="sldImg" idx="2"/>
-          </p:nvPr>
-        </p:nvSpPr>
-        <p:spPr>
-          <a:xfrm>
-            <a:off x="1143000" y="685800"/>
-            <a:ext cx="4572000" cy="3429000"/>
-          </a:xfrm>
-          <a:prstGeom prst="rect">
-            <a:avLst/>
-          </a:prstGeom>
-          <a:noFill/>
-          <a:ln w="12700">
-            <a:solidFill>
-              <a:prstClr val="black"/>
-            </a:solidFill>
-          </a:ln>
-        </p:spPr>
-        <p:txBody>
-          <a:bodyPr vert="horz" lIns="91440" tIns="45720" rIns="91440" bIns="45720" rtlCol="0" anchor="ctr"/>
-          <a:lstStyle/>
-          <a:p>
-            <a:endParaRPr lang="en-US"/>
-          </a:p>
-        </p:txBody>
-      </p:sp>
-      <p:sp>
-        <p:nvSpPr>
-          <p:cNvPr id="5" name="Notes Placeholder 4"/>
-          <p:cNvSpPr>
-            <a:spLocks noGrp="1"/>
-          </p:cNvSpPr>
-          <p:nvPr>
-            <p:ph type="body" sz="quarter" idx="3"/>
-          </p:nvPr>
-        </p:nvSpPr>
-        <p:spPr>
-          <a:xfrm>
-            <a:off x="685800" y="4343400"/>
-            <a:ext cx="5486400" cy="4114800"/>
-          </a:xfrm>
-          <a:prstGeom prst="rect">
-            <a:avLst/>
-          </a:prstGeom>
-        </p:spPr>
-        <p:txBody>
-          <a:bodyPr vert="horz" lIns="91440" tIns="45720" rIns="91440" bIns="45720" rtlCol="0"/>
-          <a:lstStyle/>
-          <a:p>
-            <a:pPr lvl="0"/>
-            <a:r>
-              <a:rPr lang="en-US" smtClean="0"/>
-              <a:t>Click to edit Master text styles</a:t>
-            </a:r>
-          </a:p>
-          <a:p>
-            <a:pPr lvl="1"/>
-            <a:r>
-              <a:rPr lang="en-US" smtClean="0"/>
-              <a:t>Second level</a:t>
-            </a:r>
-          </a:p>
-          <a:p>
-            <a:pPr lvl="2"/>
-            <a:r>
-              <a:rPr lang="en-US" smtClean="0"/>
-              <a:t>Third level</a:t>
-            </a:r>
-          </a:p>
-          <a:p>
-            <a:pPr lvl="3"/>
-            <a:r>
-              <a:rPr lang="en-US" smtClean="0"/>
-              <a:t>Fourth level</a:t>
-            </a:r>
-          </a:p>
-          <a:p>
-            <a:pPr lvl="4"/>
-            <a:r>
-              <a:rPr lang="en-US" smtClean="0"/>
-              <a:t>Fifth level</a:t>
-            </a:r>
-            <a:endParaRPr lang="en-US"/>
-          </a:p>
-        </p:txBody>
-      </p:sp>
-      <p:sp>
-        <p:nvSpPr>
-          <p:cNvPr id="6" name="Footer Placeholder 5"/>
-          <p:cNvSpPr>
-            <a:spLocks noGrp="1"/>
-          </p:cNvSpPr>
-          <p:nvPr>
-            <p:ph type="ftr" sz="quarter" idx="4"/>
-          </p:nvPr>
-        </p:nvSpPr>
-        <p:spPr>
-          <a:xfrm>
-            <a:off x="0" y="8685213"/>
-            <a:ext cx="2971800" cy="457200"/>
-          </a:xfrm>
-          <a:prstGeom prst="rect">
-            <a:avLst/>
-          </a:prstGeom>
-        </p:spPr>
-        <p:txBody>
-          <a:bodyPr vert="horz" lIns="91440" tIns="45720" rIns="91440" bIns="45720" rtlCol="0" anchor="b"/>
-          <a:lstStyle>
-            <a:lvl1pPr algn="l">
-              <a:defRPr sz="1200"/>
-            </a:lvl1pPr>
-          </a:lstStyle>
-          <a:p>
-            <a:endParaRPr lang="en-US"/>
-          </a:p>
-        </p:txBody>
-      </p:sp>
-      <p:sp>
-        <p:nvSpPr>
-          <p:cNvPr id="7" name="Slide Number Placeholder 6"/>
-          <p:cNvSpPr>
-            <a:spLocks noGrp="1"/>
-          </p:cNvSpPr>
-          <p:nvPr>
-            <p:ph type="sldNum" sz="quarter" idx="5"/>
-          </p:nvPr>
-        </p:nvSpPr>
-        <p:spPr>
-          <a:xfrm>
-            <a:off x="3884613" y="8685213"/>
-            <a:ext cx="2971800" cy="457200"/>
-          </a:xfrm>
-          <a:prstGeom prst="rect">
-            <a:avLst/>
-          </a:prstGeom>
-        </p:spPr>
-        <p:txBody>
-          <a:bodyPr vert="horz" lIns="91440" tIns="45720" rIns="91440" bIns="45720" rtlCol="0" anchor="b"/>
-          <a:lstStyle>
-            <a:lvl1pPr algn="r">
-              <a:defRPr sz="1200"/>
-            </a:lvl1pPr>
-          </a:lstStyle>
-          <a:p>
-            <a:fld id="{BB5E49A5-4136-284D-997B-48E1D791AD67}" type="slidenum">
-              <a:rPr lang="en-US" smtClean="0"/>
-              <a:t>‹#›</a:t>
-            </a:fld>
-            <a:endParaRPr lang="en-US"/>
-          </a:p>
-        </p:txBody>
-      </p:sp>
-    </p:spTree>
-    <p:extLst>
-      <p:ext uri="{BB962C8B-B14F-4D97-AF65-F5344CB8AC3E}">
-        <p14:creationId xmlns:p14="http://schemas.microsoft.com/office/powerpoint/2010/main" val="2623252185"/>
-      </p:ext>
-    </p:extLst>
-  </p:cSld>
-  <p:clrMap bg1="lt1" tx1="dk1" bg2="lt2" tx2="dk2" accent1="accent1" accent2="accent2" accent3="accent3" accent4="accent4" accent5="accent5" accent6="accent6" hlink="hlink" folHlink="folHlink"/>
-  <p:notesStyle>
-    <a:lvl1pPr marL="0" algn="l" defTabSz="457200" rtl="0" eaLnBrk="1" latinLnBrk="0" hangingPunct="1">
-      <a:defRPr sz="1200" kern="1200">
-        <a:solidFill>
-          <a:schemeClr val="tx1"/>
-        </a:solidFill>
-        <a:latin typeface="+mn-lt"/>
-        <a:ea typeface="+mn-ea"/>
-        <a:cs typeface="+mn-cs"/>
-      </a:defRPr>
-    </a:lvl1pPr>
-    <a:lvl2pPr marL="457200" algn="l" defTabSz="457200" rtl="0" eaLnBrk="1" latinLnBrk="0" hangingPunct="1">
-      <a:defRPr sz="1200" kern="1200">
-        <a:solidFill>
-          <a:schemeClr val="tx1"/>
-        </a:solidFill>
-        <a:latin typeface="+mn-lt"/>
-        <a:ea typeface="+mn-ea"/>
-        <a:cs typeface="+mn-cs"/>
-      </a:defRPr>
-    </a:lvl2pPr>
-    <a:lvl3pPr marL="914400" algn="l" defTabSz="457200" rtl="0" eaLnBrk="1" latinLnBrk="0" hangingPunct="1">
-      <a:defRPr sz="1200" kern="1200">
-        <a:solidFill>
-          <a:schemeClr val="tx1"/>
-        </a:solidFill>
-        <a:latin typeface="+mn-lt"/>
-        <a:ea typeface="+mn-ea"/>
-        <a:cs typeface="+mn-cs"/>
-      </a:defRPr>
-    </a:lvl3pPr>
-    <a:lvl4pPr marL="1371600" algn="l" defTabSz="457200" rtl="0" eaLnBrk="1" latinLnBrk="0" hangingPunct="1">
-      <a:defRPr sz="1200" kern="1200">
-        <a:solidFill>
-          <a:schemeClr val="tx1"/>
-        </a:solidFill>
-        <a:latin typeface="+mn-lt"/>
-        <a:ea typeface="+mn-ea"/>
-        <a:cs typeface="+mn-cs"/>
-      </a:defRPr>
-    </a:lvl4pPr>
-    <a:lvl5pPr marL="1828800" algn="l" defTabSz="457200" rtl="0" eaLnBrk="1" latinLnBrk="0" hangingPunct="1">
-      <a:defRPr sz="1200" kern="1200">
-        <a:solidFill>
-          <a:schemeClr val="tx1"/>
-        </a:solidFill>
-        <a:latin typeface="+mn-lt"/>
-        <a:ea typeface="+mn-ea"/>
-        <a:cs typeface="+mn-cs"/>
-      </a:defRPr>
-    </a:lvl5pPr>
-    <a:lvl6pPr marL="2286000" algn="l" defTabSz="457200" rtl="0" eaLnBrk="1" latinLnBrk="0" hangingPunct="1">
-      <a:defRPr sz="1200" kern="1200">
-        <a:solidFill>
-          <a:schemeClr val="tx1"/>
-        </a:solidFill>
-        <a:latin typeface="+mn-lt"/>
-        <a:ea typeface="+mn-ea"/>
-        <a:cs typeface="+mn-cs"/>
-      </a:defRPr>
-    </a:lvl6pPr>
-    <a:lvl7pPr marL="2743200" algn="l" defTabSz="457200" rtl="0" eaLnBrk="1" latinLnBrk="0" hangingPunct="1">
-      <a:defRPr sz="1200" kern="1200">
-        <a:solidFill>
-          <a:schemeClr val="tx1"/>
-        </a:solidFill>
-        <a:latin typeface="+mn-lt"/>
-        <a:ea typeface="+mn-ea"/>
-        <a:cs typeface="+mn-cs"/>
-      </a:defRPr>
-    </a:lvl7pPr>
-    <a:lvl8pPr marL="3200400" algn="l" defTabSz="457200" rtl="0" eaLnBrk="1" latinLnBrk="0" hangingPunct="1">
-      <a:defRPr sz="1200" kern="1200">
-        <a:solidFill>
-          <a:schemeClr val="tx1"/>
-        </a:solidFill>
-        <a:latin typeface="+mn-lt"/>
-        <a:ea typeface="+mn-ea"/>
-        <a:cs typeface="+mn-cs"/>
-      </a:defRPr>
-    </a:lvl8pPr>
-    <a:lvl9pPr marL="3657600" algn="l" defTabSz="457200" rtl="0" eaLnBrk="1" latinLnBrk="0" hangingPunct="1">
-      <a:defRPr sz="1200" kern="1200">
-        <a:solidFill>
-          <a:schemeClr val="tx1"/>
-        </a:solidFill>
-        <a:latin typeface="+mn-lt"/>
-        <a:ea typeface="+mn-ea"/>
-        <a:cs typeface="+mn-cs"/>
-      </a:defRPr>
-    </a:lvl9pPr>
-  </p:notesStyle>
-</p:notesMaster>
-</file>
-
-<file path=ppt/notesSlides/notesSlide1.xml><?xml version="1.0" encoding="utf-8"?>
-<p:notes xmlns:a="http://schemas.openxmlformats.org/drawingml/2006/main" xmlns:p="http://schemas.openxmlformats.org/presentationml/2006/main" xmlns:r="http://schemas.openxmlformats.org/officeDocument/2006/relationships">
-  <p:cSld>
-    <p:spTree>
-      <p:nvGrpSpPr>
-        <p:cNvPr id="1" name=""/>
-        <p:cNvGrpSpPr/>
-        <p:nvPr/>
-      </p:nvGrpSpPr>
-      <p:grpSpPr>
-        <a:xfrm>
-          <a:off x="0" y="0"/>
-          <a:ext cx="0" cy="0"/>
-          <a:chOff x="0" y="0"/>
-          <a:chExt cx="0" cy="0"/>
-        </a:xfrm>
-      </p:grpSpPr>
-      <p:sp>
-        <p:nvSpPr>
-          <p:cNvPr id="2" name="Slide Image Placeholder 1"/>
-          <p:cNvSpPr>
-            <a:spLocks noGrp="1"/>
-          </p:cNvSpPr>
-          <p:nvPr>
-            <p:ph type="sldImg" idx="2"/>
-          </p:nvPr>
-        </p:nvSpPr>
-        <p:spPr/>
-      </p:sp>
-      <p:sp>
-        <p:nvSpPr>
-          <p:cNvPr id="3" name="Notes Placeholder 2"/>
-          <p:cNvSpPr>
-            <a:spLocks noGrp="1"/>
-          </p:cNvSpPr>
-          <p:nvPr>
-            <p:ph type="body" idx="3" sz="quarter"/>
-          </p:nvPr>
-        </p:nvSpPr>
-        <p:spPr/>
-        <p:txBody>
-          <a:bodyPr/>
-          <a:lstStyle/>
-          <a:p>
-            <a:r>
-              <a:t>Breaking down the cellular mechanisms that respond to nutrient deprivation and increase metabolic health.</a:t>
-            </a:r>
-          </a:p>
-        </p:txBody>
-      </p:sp>
-      <p:sp>
-        <p:nvSpPr>
-          <p:cNvPr id="4" name="Slide Number Placeholder 3"/>
-          <p:cNvSpPr>
-            <a:spLocks noGrp="1"/>
-          </p:cNvSpPr>
-          <p:nvPr>
-            <p:ph type="sldNum" idx="5" sz="quarter"/>
-          </p:nvPr>
-        </p:nvSpPr>
-        <p:spPr/>
-      </p:sp>
-    </p:spTree>
-  </p:cSld>
-  <p:clrMapOvr>
-    <a:masterClrMapping/>
-  </p:clrMapOvr>
-</p:notes>
 </file>
 
 <file path=ppt/slideLayouts/slideLayout1.xml><?xml version="1.0" encoding="utf-8"?>
@@ -3506,9 +3090,17 @@
   <p:cSld>
     <p:bg>
       <p:bgPr>
-        <a:solidFill>
-          <a:srgbClr val="F5FFFA"/>
-        </a:solidFill>
+        <a:gradFill rotWithShape="1">
+          <a:gsLst>
+            <a:gs pos="0">
+              <a:srgbClr val="F87054"/>
+            </a:gs>
+            <a:gs pos="100000">
+              <a:srgbClr val="B03675"/>
+            </a:gs>
+          </a:gsLst>
+          <a:lin scaled="0" ang="5400000"/>
+        </a:gradFill>
         <a:effectLst/>
       </p:bgPr>
     </p:bg>
@@ -3521,54 +3113,276 @@
       <p:grpSpPr/>
       <p:sp>
         <p:nvSpPr>
-          <p:cNvPr id="2" name="Title 1"/>
-          <p:cNvSpPr>
-            <a:spLocks noGrp="1"/>
-          </p:cNvSpPr>
-          <p:nvPr>
-            <p:ph type="ctrTitle"/>
-          </p:nvPr>
-        </p:nvSpPr>
-        <p:spPr/>
-        <p:txBody>
-          <a:bodyPr/>
-          <a:lstStyle/>
-          <a:p>
-            <a:r>
-              <a:rPr>
+          <p:cNvPr id="2" name="TextBox 1"/>
+          <p:cNvSpPr txBox="1"/>
+          <p:nvPr/>
+        </p:nvSpPr>
+        <p:spPr>
+          <a:xfrm>
+            <a:off x="640080" y="411480"/>
+            <a:ext cx="7498079" cy="292608"/>
+          </a:xfrm>
+          <a:prstGeom prst="rect">
+            <a:avLst/>
+          </a:prstGeom>
+          <a:noFill/>
+        </p:spPr>
+        <p:txBody>
+          <a:bodyPr wrap="square" lIns="237744" rIns="237744" tIns="237744" bIns="237744">
+            <a:spAutoFit/>
+          </a:bodyPr>
+          <a:lstStyle/>
+          <a:p>
+            <a:pPr>
+              <a:spcAft>
+                <a:spcPts val="144"/>
+              </a:spcAft>
+              <a:defRPr sz="1200" b="1" i="0">
                 <a:solidFill>
-                  <a:srgbClr val="228B22"/>
+                  <a:srgbClr val="FFD783"/>
                 </a:solidFill>
-                <a:latin typeface="Georgia"/>
-              </a:rPr>
-              <a:t>The Longevity Code: Optimizing Human Lifespan</a:t>
-            </a:r>
-          </a:p>
-        </p:txBody>
-      </p:sp>
-      <p:sp>
-        <p:nvSpPr>
-          <p:cNvPr id="3" name="Subtitle 2"/>
-          <p:cNvSpPr>
-            <a:spLocks noGrp="1"/>
-          </p:cNvSpPr>
-          <p:nvPr>
-            <p:ph type="subTitle" idx="1"/>
-          </p:nvPr>
-        </p:nvSpPr>
-        <p:spPr/>
-        <p:txBody>
-          <a:bodyPr/>
-          <a:lstStyle/>
-          <a:p>
-            <a:r>
-              <a:rPr>
+                <a:latin typeface="Aptos"/>
+              </a:defRPr>
+            </a:pPr>
+            <a:r>
+              <a:t>AUTOPPT</a:t>
+            </a:r>
+          </a:p>
+        </p:txBody>
+      </p:sp>
+      <p:sp>
+        <p:nvSpPr>
+          <p:cNvPr id="3" name="TextBox 2"/>
+          <p:cNvSpPr txBox="1"/>
+          <p:nvPr/>
+        </p:nvSpPr>
+        <p:spPr>
+          <a:xfrm>
+            <a:off x="640080" y="722376"/>
+            <a:ext cx="7498079" cy="1645920"/>
+          </a:xfrm>
+          <a:prstGeom prst="rect">
+            <a:avLst/>
+          </a:prstGeom>
+          <a:noFill/>
+        </p:spPr>
+        <p:txBody>
+          <a:bodyPr wrap="square" lIns="237744" rIns="237744" tIns="237744" bIns="237744">
+            <a:spAutoFit/>
+          </a:bodyPr>
+          <a:lstStyle/>
+          <a:p>
+            <a:pPr>
+              <a:spcAft>
+                <a:spcPts val="220"/>
+              </a:spcAft>
+              <a:defRPr sz="4400" b="1" i="0">
                 <a:solidFill>
-                  <a:srgbClr val="325032"/>
+                  <a:srgbClr val="FFFFFF"/>
                 </a:solidFill>
-                <a:latin typeface="Georgia"/>
-              </a:rPr>
-              <a:t>Topic: Science of Longevity: Nutrition and Sleep</a:t>
+                <a:latin typeface="Aptos Display"/>
+              </a:defRPr>
+            </a:pPr>
+            <a:r>
+              <a:t>Healthy Living Lifestyle</a:t>
+            </a:r>
+          </a:p>
+        </p:txBody>
+      </p:sp>
+      <p:sp>
+        <p:nvSpPr>
+          <p:cNvPr id="4" name="TextBox 3"/>
+          <p:cNvSpPr txBox="1"/>
+          <p:nvPr/>
+        </p:nvSpPr>
+        <p:spPr>
+          <a:xfrm>
+            <a:off x="640080" y="1673351"/>
+            <a:ext cx="7498079" cy="822960"/>
+          </a:xfrm>
+          <a:prstGeom prst="rect">
+            <a:avLst/>
+          </a:prstGeom>
+          <a:noFill/>
+        </p:spPr>
+        <p:txBody>
+          <a:bodyPr wrap="square" lIns="237744" rIns="237744" tIns="237744" bIns="237744">
+            <a:spAutoFit/>
+          </a:bodyPr>
+          <a:lstStyle/>
+          <a:p>
+            <a:pPr>
+              <a:spcAft>
+                <a:spcPts val="216"/>
+              </a:spcAft>
+              <a:defRPr sz="1800" b="0" i="0">
+                <a:solidFill>
+                  <a:srgbClr val="FFD7C8"/>
+                </a:solidFill>
+                <a:latin typeface="Aptos"/>
+              </a:defRPr>
+            </a:pPr>
+            <a:r>
+              <a:t>A calmer system for energy and resilience</a:t>
+            </a:r>
+          </a:p>
+        </p:txBody>
+      </p:sp>
+      <p:sp>
+        <p:nvSpPr>
+          <p:cNvPr id="5" name="Rectangle 4"/>
+          <p:cNvSpPr/>
+          <p:nvPr/>
+        </p:nvSpPr>
+        <p:spPr>
+          <a:xfrm>
+            <a:off x="640080" y="1508760"/>
+            <a:ext cx="1371600" cy="45720"/>
+          </a:xfrm>
+          <a:prstGeom prst="rect">
+            <a:avLst/>
+          </a:prstGeom>
+          <a:solidFill>
+            <a:srgbClr val="FFD783"/>
+          </a:solidFill>
+          <a:ln>
+            <a:noFill/>
+          </a:ln>
+        </p:spPr>
+        <p:style>
+          <a:lnRef idx="1">
+            <a:schemeClr val="accent1"/>
+          </a:lnRef>
+          <a:fillRef idx="3">
+            <a:schemeClr val="accent1"/>
+          </a:fillRef>
+          <a:effectRef idx="2">
+            <a:schemeClr val="accent1"/>
+          </a:effectRef>
+          <a:fontRef idx="minor">
+            <a:schemeClr val="lt1"/>
+          </a:fontRef>
+        </p:style>
+        <p:txBody>
+          <a:bodyPr rtlCol="0" anchor="ctr"/>
+          <a:lstStyle/>
+          <a:p>
+            <a:pPr algn="ctr"/>
+          </a:p>
+        </p:txBody>
+      </p:sp>
+      <p:sp>
+        <p:nvSpPr>
+          <p:cNvPr id="6" name="Rounded Rectangle 5"/>
+          <p:cNvSpPr/>
+          <p:nvPr/>
+        </p:nvSpPr>
+        <p:spPr>
+          <a:xfrm>
+            <a:off x="640080" y="2194560"/>
+            <a:ext cx="3840480" cy="1325880"/>
+          </a:xfrm>
+          <a:prstGeom prst="roundRect">
+            <a:avLst/>
+          </a:prstGeom>
+          <a:solidFill>
+            <a:srgbClr val="C9576E"/>
+          </a:solidFill>
+          <a:ln w="15875">
+            <a:solidFill>
+              <a:srgbClr val="FFC7AC"/>
+            </a:solidFill>
+          </a:ln>
+        </p:spPr>
+        <p:style>
+          <a:lnRef idx="1">
+            <a:schemeClr val="accent1"/>
+          </a:lnRef>
+          <a:fillRef idx="3">
+            <a:schemeClr val="accent1"/>
+          </a:fillRef>
+          <a:effectRef idx="2">
+            <a:schemeClr val="accent1"/>
+          </a:effectRef>
+          <a:fontRef idx="minor">
+            <a:schemeClr val="lt1"/>
+          </a:fontRef>
+        </p:style>
+        <p:txBody>
+          <a:bodyPr rtlCol="0" anchor="ctr"/>
+          <a:lstStyle/>
+          <a:p>
+            <a:pPr algn="ctr"/>
+          </a:p>
+        </p:txBody>
+      </p:sp>
+      <p:sp>
+        <p:nvSpPr>
+          <p:cNvPr id="7" name="TextBox 6"/>
+          <p:cNvSpPr txBox="1"/>
+          <p:nvPr/>
+        </p:nvSpPr>
+        <p:spPr>
+          <a:xfrm>
+            <a:off x="731519" y="2267712"/>
+            <a:ext cx="3657600" cy="1179576"/>
+          </a:xfrm>
+          <a:prstGeom prst="rect">
+            <a:avLst/>
+          </a:prstGeom>
+          <a:noFill/>
+        </p:spPr>
+        <p:txBody>
+          <a:bodyPr wrap="square" lIns="237744" rIns="237744" tIns="237744" bIns="237744">
+            <a:spAutoFit/>
+          </a:bodyPr>
+          <a:lstStyle/>
+          <a:p>
+            <a:pPr>
+              <a:spcAft>
+                <a:spcPts val="144"/>
+              </a:spcAft>
+              <a:defRPr sz="1800" b="0" i="0">
+                <a:solidFill>
+                  <a:srgbClr val="FFEFE0"/>
+                </a:solidFill>
+                <a:latin typeface="Aptos"/>
+              </a:defRPr>
+            </a:pPr>
+            <a:r>
+              <a:t>PowerPoint-native output</a:t>
+            </a:r>
+          </a:p>
+          <a:p>
+            <a:pPr>
+              <a:spcAft>
+                <a:spcPts val="144"/>
+              </a:spcAft>
+              <a:defRPr sz="1800" b="0" i="0">
+                <a:solidFill>
+                  <a:srgbClr val="FFEFE0"/>
+                </a:solidFill>
+                <a:latin typeface="Aptos"/>
+              </a:defRPr>
+            </a:pPr>
+            <a:r>
+              <a:t>Layout-aware slide planning</a:t>
+            </a:r>
+          </a:p>
+          <a:p>
+            <a:pPr>
+              <a:spcAft>
+                <a:spcPts val="144"/>
+              </a:spcAft>
+              <a:defRPr sz="1800" b="0" i="0">
+                <a:solidFill>
+                  <a:srgbClr val="FFEFE0"/>
+                </a:solidFill>
+                <a:latin typeface="Aptos"/>
+              </a:defRPr>
+            </a:pPr>
+            <a:r>
+              <a:t>Template and remix ready</a:t>
             </a:r>
           </a:p>
         </p:txBody>
@@ -3586,9 +3400,17 @@
   <p:cSld>
     <p:bg>
       <p:bgPr>
-        <a:solidFill>
-          <a:srgbClr val="F5FFFA"/>
-        </a:solidFill>
+        <a:gradFill rotWithShape="1">
+          <a:gsLst>
+            <a:gs pos="0">
+              <a:srgbClr val="F87054"/>
+            </a:gs>
+            <a:gs pos="100000">
+              <a:srgbClr val="B03675"/>
+            </a:gs>
+          </a:gsLst>
+          <a:lin scaled="0" ang="5400000"/>
+        </a:gradFill>
         <a:effectLst/>
       </p:bgPr>
     </p:bg>
@@ -3599,48 +3421,149 @@
         <p:nvPr/>
       </p:nvGrpSpPr>
       <p:grpSpPr/>
-      <p:sp>
-        <p:nvSpPr>
-          <p:cNvPr id="2" name="Title 1"/>
-          <p:cNvSpPr>
-            <a:spLocks noGrp="1"/>
-          </p:cNvSpPr>
-          <p:nvPr>
-            <p:ph type="title"/>
-          </p:nvPr>
-        </p:nvSpPr>
-        <p:spPr/>
-        <p:txBody>
-          <a:bodyPr/>
-          <a:lstStyle/>
-          <a:p>
-            <a:r>
-              <a:rPr>
+      <p:pic>
+        <p:nvPicPr>
+          <p:cNvPr id="2" name="Picture 1" descr="tmp8nbiz2vk.png"/>
+          <p:cNvPicPr>
+            <a:picLocks noChangeAspect="1"/>
+          </p:cNvPicPr>
+          <p:nvPr/>
+        </p:nvPicPr>
+        <p:blipFill>
+          <a:blip r:embed="rId2"/>
+          <a:stretch>
+            <a:fillRect/>
+          </a:stretch>
+        </p:blipFill>
+        <p:spPr>
+          <a:xfrm>
+            <a:off x="0" y="0"/>
+            <a:ext cx="9144000" cy="6858000"/>
+          </a:xfrm>
+          <a:prstGeom prst="rect">
+            <a:avLst/>
+          </a:prstGeom>
+        </p:spPr>
+      </p:pic>
+      <p:sp>
+        <p:nvSpPr>
+          <p:cNvPr id="3" name="Rectangle 2"/>
+          <p:cNvSpPr/>
+          <p:nvPr/>
+        </p:nvSpPr>
+        <p:spPr>
+          <a:xfrm>
+            <a:off x="0" y="0"/>
+            <a:ext cx="9144000" cy="6858000"/>
+          </a:xfrm>
+          <a:prstGeom prst="rect">
+            <a:avLst/>
+          </a:prstGeom>
+          <a:solidFill>
+            <a:srgbClr val="080C12"/>
+          </a:solidFill>
+          <a:ln>
+            <a:noFill/>
+          </a:ln>
+        </p:spPr>
+        <p:style>
+          <a:lnRef idx="1">
+            <a:schemeClr val="accent1"/>
+          </a:lnRef>
+          <a:fillRef idx="3">
+            <a:schemeClr val="accent1"/>
+          </a:fillRef>
+          <a:effectRef idx="2">
+            <a:schemeClr val="accent1"/>
+          </a:effectRef>
+          <a:fontRef idx="minor">
+            <a:schemeClr val="lt1"/>
+          </a:fontRef>
+        </p:style>
+        <p:txBody>
+          <a:bodyPr rtlCol="0" anchor="ctr"/>
+          <a:lstStyle/>
+          <a:p>
+            <a:pPr algn="ctr"/>
+          </a:p>
+        </p:txBody>
+      </p:sp>
+      <p:sp>
+        <p:nvSpPr>
+          <p:cNvPr id="4" name="TextBox 3"/>
+          <p:cNvSpPr txBox="1"/>
+          <p:nvPr/>
+        </p:nvSpPr>
+        <p:spPr>
+          <a:xfrm>
+            <a:off x="640080" y="4389120"/>
+            <a:ext cx="7863840" cy="1097280"/>
+          </a:xfrm>
+          <a:prstGeom prst="rect">
+            <a:avLst/>
+          </a:prstGeom>
+          <a:noFill/>
+        </p:spPr>
+        <p:txBody>
+          <a:bodyPr wrap="square" lIns="237744" rIns="237744" tIns="237744" bIns="237744">
+            <a:spAutoFit/>
+          </a:bodyPr>
+          <a:lstStyle/>
+          <a:p>
+            <a:pPr>
+              <a:spcAft>
+                <a:spcPts val="527"/>
+              </a:spcAft>
+              <a:defRPr sz="4400" b="1" i="0">
                 <a:solidFill>
-                  <a:srgbClr val="228B22"/>
+                  <a:srgbClr val="FFFFFF"/>
                 </a:solidFill>
-                <a:latin typeface="Georgia"/>
-              </a:rPr>
-              <a:t>Autophagy and The Biology of Fasting</a:t>
-            </a:r>
-          </a:p>
-        </p:txBody>
-      </p:sp>
-      <p:sp>
-        <p:nvSpPr>
-          <p:cNvPr id="3" name="Text Placeholder 2"/>
-          <p:cNvSpPr>
-            <a:spLocks noGrp="1"/>
-          </p:cNvSpPr>
-          <p:nvPr>
-            <p:ph type="body" idx="1"/>
-          </p:nvPr>
-        </p:nvSpPr>
-        <p:spPr/>
-        <p:txBody>
-          <a:bodyPr/>
-          <a:lstStyle/>
-          <a:p/>
+                <a:latin typeface="Aptos Display"/>
+              </a:defRPr>
+            </a:pPr>
+            <a:r>
+              <a:t>Lifestyle cover slide</a:t>
+            </a:r>
+          </a:p>
+        </p:txBody>
+      </p:sp>
+      <p:sp>
+        <p:nvSpPr>
+          <p:cNvPr id="5" name="TextBox 4"/>
+          <p:cNvSpPr txBox="1"/>
+          <p:nvPr/>
+        </p:nvSpPr>
+        <p:spPr>
+          <a:xfrm>
+            <a:off x="640080" y="6144768"/>
+            <a:ext cx="7863840" cy="274320"/>
+          </a:xfrm>
+          <a:prstGeom prst="rect">
+            <a:avLst/>
+          </a:prstGeom>
+          <a:noFill/>
+        </p:spPr>
+        <p:txBody>
+          <a:bodyPr wrap="square" lIns="237744" rIns="237744" tIns="237744" bIns="237744">
+            <a:spAutoFit/>
+          </a:bodyPr>
+          <a:lstStyle/>
+          <a:p>
+            <a:pPr>
+              <a:spcAft>
+                <a:spcPts val="144"/>
+              </a:spcAft>
+              <a:defRPr sz="1200" b="0" i="0">
+                <a:solidFill>
+                  <a:srgbClr val="F4F7FA"/>
+                </a:solidFill>
+                <a:latin typeface="Aptos"/>
+              </a:defRPr>
+            </a:pPr>
+            <a:r>
+              <a:t>A softer, image-led opening for wellness storytelling</a:t>
+            </a:r>
+          </a:p>
         </p:txBody>
       </p:sp>
     </p:spTree>
@@ -3656,9 +3579,17 @@
   <p:cSld>
     <p:bg>
       <p:bgPr>
-        <a:solidFill>
-          <a:srgbClr val="F5FFFA"/>
-        </a:solidFill>
+        <a:gradFill rotWithShape="1">
+          <a:gsLst>
+            <a:gs pos="0">
+              <a:srgbClr val="F87054"/>
+            </a:gs>
+            <a:gs pos="100000">
+              <a:srgbClr val="B03675"/>
+            </a:gs>
+          </a:gsLst>
+          <a:lin scaled="0" ang="5400000"/>
+        </a:gradFill>
         <a:effectLst/>
       </p:bgPr>
     </p:bg>
@@ -3671,96 +3602,271 @@
       <p:grpSpPr/>
       <p:sp>
         <p:nvSpPr>
-          <p:cNvPr id="2" name="Title 1"/>
-          <p:cNvSpPr>
-            <a:spLocks noGrp="1"/>
-          </p:cNvSpPr>
-          <p:nvPr>
-            <p:ph type="title"/>
-          </p:nvPr>
-        </p:nvSpPr>
-        <p:spPr/>
-        <p:txBody>
-          <a:bodyPr/>
-          <a:lstStyle/>
-          <a:p>
-            <a:r>
-              <a:rPr>
+          <p:cNvPr id="2" name="TextBox 1"/>
+          <p:cNvSpPr txBox="1"/>
+          <p:nvPr/>
+        </p:nvSpPr>
+        <p:spPr>
+          <a:xfrm>
+            <a:off x="640080" y="411480"/>
+            <a:ext cx="7498079" cy="1645920"/>
+          </a:xfrm>
+          <a:prstGeom prst="rect">
+            <a:avLst/>
+          </a:prstGeom>
+          <a:noFill/>
+        </p:spPr>
+        <p:txBody>
+          <a:bodyPr wrap="square" lIns="237744" rIns="237744" tIns="237744" bIns="237744">
+            <a:spAutoFit/>
+          </a:bodyPr>
+          <a:lstStyle/>
+          <a:p>
+            <a:pPr>
+              <a:spcAft>
+                <a:spcPts val="140"/>
+              </a:spcAft>
+              <a:defRPr sz="2800" b="1" i="0">
                 <a:solidFill>
-                  <a:srgbClr val="228B22"/>
+                  <a:srgbClr val="FFFFFF"/>
                 </a:solidFill>
-                <a:latin typeface="Georgia"/>
-              </a:rPr>
-              <a:t>Yoshinori Ohsumi’s Nobel Discovery</a:t>
-            </a:r>
-          </a:p>
-        </p:txBody>
-      </p:sp>
-      <p:sp>
-        <p:nvSpPr>
-          <p:cNvPr id="3" name="Content Placeholder 2"/>
-          <p:cNvSpPr>
-            <a:spLocks noGrp="1"/>
-          </p:cNvSpPr>
-          <p:nvPr>
-            <p:ph idx="1"/>
-          </p:nvPr>
-        </p:nvSpPr>
-        <p:spPr/>
-        <p:txBody>
-          <a:bodyPr wrap="square"/>
-          <a:lstStyle/>
-          <a:p/>
-          <a:p>
-            <a:pPr/>
-            <a:r>
-              <a:rPr>
+                <a:latin typeface="Aptos Display"/>
+              </a:defRPr>
+            </a:pPr>
+            <a:r>
+              <a:t>The steady-day rule</a:t>
+            </a:r>
+          </a:p>
+        </p:txBody>
+      </p:sp>
+      <p:sp>
+        <p:nvSpPr>
+          <p:cNvPr id="3" name="Rectangle 2"/>
+          <p:cNvSpPr/>
+          <p:nvPr/>
+        </p:nvSpPr>
+        <p:spPr>
+          <a:xfrm>
+            <a:off x="640080" y="1197863"/>
+            <a:ext cx="1371600" cy="45720"/>
+          </a:xfrm>
+          <a:prstGeom prst="rect">
+            <a:avLst/>
+          </a:prstGeom>
+          <a:solidFill>
+            <a:srgbClr val="FFD783"/>
+          </a:solidFill>
+          <a:ln>
+            <a:noFill/>
+          </a:ln>
+        </p:spPr>
+        <p:style>
+          <a:lnRef idx="1">
+            <a:schemeClr val="accent1"/>
+          </a:lnRef>
+          <a:fillRef idx="3">
+            <a:schemeClr val="accent1"/>
+          </a:fillRef>
+          <a:effectRef idx="2">
+            <a:schemeClr val="accent1"/>
+          </a:effectRef>
+          <a:fontRef idx="minor">
+            <a:schemeClr val="lt1"/>
+          </a:fontRef>
+        </p:style>
+        <p:txBody>
+          <a:bodyPr rtlCol="0" anchor="ctr"/>
+          <a:lstStyle/>
+          <a:p>
+            <a:pPr algn="ctr"/>
+          </a:p>
+        </p:txBody>
+      </p:sp>
+      <p:sp>
+        <p:nvSpPr>
+          <p:cNvPr id="4" name="Rounded Rectangle 3"/>
+          <p:cNvSpPr/>
+          <p:nvPr/>
+        </p:nvSpPr>
+        <p:spPr>
+          <a:xfrm>
+            <a:off x="658368" y="1280160"/>
+            <a:ext cx="4315967" cy="5029200"/>
+          </a:xfrm>
+          <a:prstGeom prst="roundRect">
+            <a:avLst/>
+          </a:prstGeom>
+          <a:solidFill>
+            <a:srgbClr val="C9576E"/>
+          </a:solidFill>
+          <a:ln w="15875">
+            <a:solidFill>
+              <a:srgbClr val="FFC7AC"/>
+            </a:solidFill>
+          </a:ln>
+        </p:spPr>
+        <p:style>
+          <a:lnRef idx="1">
+            <a:schemeClr val="accent1"/>
+          </a:lnRef>
+          <a:fillRef idx="3">
+            <a:schemeClr val="accent1"/>
+          </a:fillRef>
+          <a:effectRef idx="2">
+            <a:schemeClr val="accent1"/>
+          </a:effectRef>
+          <a:fontRef idx="minor">
+            <a:schemeClr val="lt1"/>
+          </a:fontRef>
+        </p:style>
+        <p:txBody>
+          <a:bodyPr rtlCol="0" anchor="ctr"/>
+          <a:lstStyle/>
+          <a:p>
+            <a:pPr algn="ctr"/>
+          </a:p>
+        </p:txBody>
+      </p:sp>
+      <p:sp>
+        <p:nvSpPr>
+          <p:cNvPr id="5" name="Rounded Rectangle 4"/>
+          <p:cNvSpPr/>
+          <p:nvPr/>
+        </p:nvSpPr>
+        <p:spPr>
+          <a:xfrm>
+            <a:off x="5285231" y="1280160"/>
+            <a:ext cx="3200400" cy="5029200"/>
+          </a:xfrm>
+          <a:prstGeom prst="roundRect">
+            <a:avLst/>
+          </a:prstGeom>
+          <a:solidFill>
+            <a:srgbClr val="C9576E"/>
+          </a:solidFill>
+          <a:ln w="15875">
+            <a:solidFill>
+              <a:srgbClr val="FFC7AC"/>
+            </a:solidFill>
+          </a:ln>
+        </p:spPr>
+        <p:style>
+          <a:lnRef idx="1">
+            <a:schemeClr val="accent1"/>
+          </a:lnRef>
+          <a:fillRef idx="3">
+            <a:schemeClr val="accent1"/>
+          </a:fillRef>
+          <a:effectRef idx="2">
+            <a:schemeClr val="accent1"/>
+          </a:effectRef>
+          <a:fontRef idx="minor">
+            <a:schemeClr val="lt1"/>
+          </a:fontRef>
+        </p:style>
+        <p:txBody>
+          <a:bodyPr rtlCol="0" anchor="ctr"/>
+          <a:lstStyle/>
+          <a:p>
+            <a:pPr algn="ctr"/>
+          </a:p>
+        </p:txBody>
+      </p:sp>
+      <p:sp>
+        <p:nvSpPr>
+          <p:cNvPr id="6" name="TextBox 5"/>
+          <p:cNvSpPr txBox="1"/>
+          <p:nvPr/>
+        </p:nvSpPr>
+        <p:spPr>
+          <a:xfrm>
+            <a:off x="704088" y="1325880"/>
+            <a:ext cx="4224527" cy="4937760"/>
+          </a:xfrm>
+          <a:prstGeom prst="rect">
+            <a:avLst/>
+          </a:prstGeom>
+          <a:noFill/>
+        </p:spPr>
+        <p:txBody>
+          <a:bodyPr wrap="square" lIns="237744" rIns="237744" tIns="237744" bIns="237744">
+            <a:spAutoFit/>
+          </a:bodyPr>
+          <a:lstStyle/>
+          <a:p>
+            <a:pPr>
+              <a:spcAft>
+                <a:spcPts val="180"/>
+              </a:spcAft>
+              <a:defRPr sz="1800" b="0" i="0">
                 <a:solidFill>
-                  <a:srgbClr val="325032"/>
+                  <a:srgbClr val="FFEFE0"/>
                 </a:solidFill>
-                <a:latin typeface="Georgia"/>
-              </a:rPr>
-              <a:t>Cellular Self-Cleaning: How cells degrade and recycle damaged components via lysosomes.</a:t>
-            </a:r>
-          </a:p>
-          <a:p>
-            <a:pPr/>
-            <a:r>
-              <a:rPr>
+                <a:latin typeface="Aptos"/>
+              </a:defRPr>
+            </a:pPr>
+            <a:r>
+              <a:t>Design for repeatability first.</a:t>
+            </a:r>
+          </a:p>
+          <a:p>
+            <a:pPr>
+              <a:spcAft>
+                <a:spcPts val="180"/>
+              </a:spcAft>
+              <a:defRPr sz="1800" b="0" i="0">
                 <a:solidFill>
-                  <a:srgbClr val="325032"/>
+                  <a:srgbClr val="FFEFE0"/>
                 </a:solidFill>
-                <a:latin typeface="Georgia"/>
-              </a:rPr>
-              <a:t>mTOR Pathways: Inhibiting growth signals to promote longevity and cellular repair.</a:t>
-            </a:r>
-          </a:p>
-          <a:p>
-            <a:pPr/>
-            <a:r>
-              <a:rPr>
+                <a:latin typeface="Aptos"/>
+              </a:defRPr>
+            </a:pPr>
+            <a:r>
+              <a:t>Make recovery visible.</a:t>
+            </a:r>
+          </a:p>
+          <a:p>
+            <a:pPr>
+              <a:spcAft>
+                <a:spcPts val="180"/>
+              </a:spcAft>
+              <a:defRPr sz="1800" b="0" i="0">
                 <a:solidFill>
-                  <a:srgbClr val="325032"/>
+                  <a:srgbClr val="FFEFE0"/>
                 </a:solidFill>
-                <a:latin typeface="Georgia"/>
-              </a:rPr>
-              <a:t>Time-Restricted Feeding (TRF): Syncing intake windows with biological circadian rhythms.</a:t>
-            </a:r>
-          </a:p>
-          <a:p>
-            <a:pPr/>
-            <a:r>
-              <a:rPr>
-                <a:solidFill>
-                  <a:srgbClr val="325032"/>
-                </a:solidFill>
-                <a:latin typeface="Georgia"/>
-              </a:rPr>
-              <a:t>Senescent 'Zombie' Cells: The role of senolytics in removing inflammation-inducing cells.</a:t>
-            </a:r>
-          </a:p>
-        </p:txBody>
-      </p:sp>
+                <a:latin typeface="Aptos"/>
+              </a:defRPr>
+            </a:pPr>
+            <a:r>
+              <a:t>Let the environment do the work.</a:t>
+            </a:r>
+          </a:p>
+        </p:txBody>
+      </p:sp>
+      <p:pic>
+        <p:nvPicPr>
+          <p:cNvPr id="7" name="Picture 6" descr="tmp2hjbctk1.png"/>
+          <p:cNvPicPr>
+            <a:picLocks noChangeAspect="1"/>
+          </p:cNvPicPr>
+          <p:nvPr/>
+        </p:nvPicPr>
+        <p:blipFill>
+          <a:blip r:embed="rId2"/>
+          <a:stretch>
+            <a:fillRect/>
+          </a:stretch>
+        </p:blipFill>
+        <p:spPr>
+          <a:xfrm>
+            <a:off x="5285231" y="1280160"/>
+            <a:ext cx="3200400" cy="5029200"/>
+          </a:xfrm>
+          <a:prstGeom prst="rect">
+            <a:avLst/>
+          </a:prstGeom>
+        </p:spPr>
+      </p:pic>
     </p:spTree>
   </p:cSld>
   <p:clrMapOvr>
@@ -3772,6 +3878,22 @@
 <file path=ppt/slides/slide4.xml><?xml version="1.0" encoding="utf-8"?>
 <p:sld xmlns:a="http://schemas.openxmlformats.org/drawingml/2006/main" xmlns:p="http://schemas.openxmlformats.org/presentationml/2006/main" xmlns:r="http://schemas.openxmlformats.org/officeDocument/2006/relationships">
   <p:cSld>
+    <p:bg>
+      <p:bgPr>
+        <a:gradFill rotWithShape="1">
+          <a:gsLst>
+            <a:gs pos="0">
+              <a:srgbClr val="F87054"/>
+            </a:gs>
+            <a:gs pos="100000">
+              <a:srgbClr val="B03675"/>
+            </a:gs>
+          </a:gsLst>
+          <a:lin scaled="0" ang="5400000"/>
+        </a:gradFill>
+        <a:effectLst/>
+      </p:bgPr>
+    </p:bg>
     <p:spTree>
       <p:nvGrpSpPr>
         <p:cNvPr id="1" name=""/>
@@ -3781,19 +3903,1323 @@
       <p:grpSpPr/>
       <p:sp>
         <p:nvSpPr>
-          <p:cNvPr id="2" name="Title 1"/>
-          <p:cNvSpPr>
-            <a:spLocks noGrp="1"/>
-          </p:cNvSpPr>
-          <p:nvPr>
-            <p:ph type="title"/>
-          </p:nvPr>
-        </p:nvSpPr>
-        <p:spPr/>
-        <p:txBody>
-          <a:bodyPr/>
-          <a:lstStyle/>
-          <a:p>
+          <p:cNvPr id="2" name="TextBox 1"/>
+          <p:cNvSpPr txBox="1"/>
+          <p:nvPr/>
+        </p:nvSpPr>
+        <p:spPr>
+          <a:xfrm>
+            <a:off x="640080" y="411480"/>
+            <a:ext cx="7498079" cy="1645920"/>
+          </a:xfrm>
+          <a:prstGeom prst="rect">
+            <a:avLst/>
+          </a:prstGeom>
+          <a:noFill/>
+        </p:spPr>
+        <p:txBody>
+          <a:bodyPr wrap="square" lIns="237744" rIns="237744" tIns="237744" bIns="237744">
+            <a:spAutoFit/>
+          </a:bodyPr>
+          <a:lstStyle/>
+          <a:p>
+            <a:pPr>
+              <a:spcAft>
+                <a:spcPts val="140"/>
+              </a:spcAft>
+              <a:defRPr sz="2800" b="1" i="0">
+                <a:solidFill>
+                  <a:srgbClr val="FFFFFF"/>
+                </a:solidFill>
+                <a:latin typeface="Aptos Display"/>
+              </a:defRPr>
+            </a:pPr>
+            <a:r>
+              <a:t>Baseline targets</a:t>
+            </a:r>
+          </a:p>
+        </p:txBody>
+      </p:sp>
+      <p:sp>
+        <p:nvSpPr>
+          <p:cNvPr id="3" name="Rectangle 2"/>
+          <p:cNvSpPr/>
+          <p:nvPr/>
+        </p:nvSpPr>
+        <p:spPr>
+          <a:xfrm>
+            <a:off x="640080" y="1197863"/>
+            <a:ext cx="1371600" cy="45720"/>
+          </a:xfrm>
+          <a:prstGeom prst="rect">
+            <a:avLst/>
+          </a:prstGeom>
+          <a:solidFill>
+            <a:srgbClr val="FFD783"/>
+          </a:solidFill>
+          <a:ln>
+            <a:noFill/>
+          </a:ln>
+        </p:spPr>
+        <p:style>
+          <a:lnRef idx="1">
+            <a:schemeClr val="accent1"/>
+          </a:lnRef>
+          <a:fillRef idx="3">
+            <a:schemeClr val="accent1"/>
+          </a:fillRef>
+          <a:effectRef idx="2">
+            <a:schemeClr val="accent1"/>
+          </a:effectRef>
+          <a:fontRef idx="minor">
+            <a:schemeClr val="lt1"/>
+          </a:fontRef>
+        </p:style>
+        <p:txBody>
+          <a:bodyPr rtlCol="0" anchor="ctr"/>
+          <a:lstStyle/>
+          <a:p>
+            <a:pPr algn="ctr"/>
+          </a:p>
+        </p:txBody>
+      </p:sp>
+      <p:sp>
+        <p:nvSpPr>
+          <p:cNvPr id="4" name="Rounded Rectangle 3"/>
+          <p:cNvSpPr/>
+          <p:nvPr/>
+        </p:nvSpPr>
+        <p:spPr>
+          <a:xfrm>
+            <a:off x="658368" y="2011680"/>
+            <a:ext cx="2462783" cy="1920240"/>
+          </a:xfrm>
+          <a:prstGeom prst="roundRect">
+            <a:avLst/>
+          </a:prstGeom>
+          <a:solidFill>
+            <a:srgbClr val="C9576E"/>
+          </a:solidFill>
+          <a:ln w="15875">
+            <a:solidFill>
+              <a:srgbClr val="FFC7AC"/>
+            </a:solidFill>
+          </a:ln>
+        </p:spPr>
+        <p:style>
+          <a:lnRef idx="1">
+            <a:schemeClr val="accent1"/>
+          </a:lnRef>
+          <a:fillRef idx="3">
+            <a:schemeClr val="accent1"/>
+          </a:fillRef>
+          <a:effectRef idx="2">
+            <a:schemeClr val="accent1"/>
+          </a:effectRef>
+          <a:fontRef idx="minor">
+            <a:schemeClr val="lt1"/>
+          </a:fontRef>
+        </p:style>
+        <p:txBody>
+          <a:bodyPr rtlCol="0" anchor="ctr"/>
+          <a:lstStyle/>
+          <a:p>
+            <a:pPr algn="ctr"/>
+          </a:p>
+        </p:txBody>
+      </p:sp>
+      <p:sp>
+        <p:nvSpPr>
+          <p:cNvPr id="5" name="TextBox 4"/>
+          <p:cNvSpPr txBox="1"/>
+          <p:nvPr/>
+        </p:nvSpPr>
+        <p:spPr>
+          <a:xfrm>
+            <a:off x="731519" y="2304288"/>
+            <a:ext cx="2316479" cy="731520"/>
+          </a:xfrm>
+          <a:prstGeom prst="rect">
+            <a:avLst/>
+          </a:prstGeom>
+          <a:noFill/>
+        </p:spPr>
+        <p:txBody>
+          <a:bodyPr wrap="square" lIns="237744" rIns="237744" tIns="237744" bIns="237744">
+            <a:spAutoFit/>
+          </a:bodyPr>
+          <a:lstStyle/>
+          <a:p>
+            <a:pPr algn="ctr">
+              <a:spcAft>
+                <a:spcPts val="408"/>
+              </a:spcAft>
+              <a:defRPr sz="3400" b="1" i="0">
+                <a:solidFill>
+                  <a:srgbClr val="FFD783"/>
+                </a:solidFill>
+                <a:latin typeface="Aptos Display"/>
+              </a:defRPr>
+            </a:pPr>
+            <a:r>
+              <a:t>150 min</a:t>
+            </a:r>
+          </a:p>
+        </p:txBody>
+      </p:sp>
+      <p:sp>
+        <p:nvSpPr>
+          <p:cNvPr id="6" name="TextBox 5"/>
+          <p:cNvSpPr txBox="1"/>
+          <p:nvPr/>
+        </p:nvSpPr>
+        <p:spPr>
+          <a:xfrm>
+            <a:off x="731519" y="3127248"/>
+            <a:ext cx="2316479" cy="640080"/>
+          </a:xfrm>
+          <a:prstGeom prst="rect">
+            <a:avLst/>
+          </a:prstGeom>
+          <a:noFill/>
+        </p:spPr>
+        <p:txBody>
+          <a:bodyPr wrap="square" lIns="237744" rIns="237744" tIns="237744" bIns="237744">
+            <a:spAutoFit/>
+          </a:bodyPr>
+          <a:lstStyle/>
+          <a:p>
+            <a:pPr algn="ctr">
+              <a:spcAft>
+                <a:spcPts val="168"/>
+              </a:spcAft>
+              <a:defRPr sz="1400" b="0" i="0">
+                <a:solidFill>
+                  <a:srgbClr val="FFEFE0"/>
+                </a:solidFill>
+                <a:latin typeface="Aptos"/>
+              </a:defRPr>
+            </a:pPr>
+            <a:r>
+              <a:t>Weekly activity</a:t>
+            </a:r>
+          </a:p>
+        </p:txBody>
+      </p:sp>
+      <p:sp>
+        <p:nvSpPr>
+          <p:cNvPr id="7" name="Rounded Rectangle 6"/>
+          <p:cNvSpPr/>
+          <p:nvPr/>
+        </p:nvSpPr>
+        <p:spPr>
+          <a:xfrm>
+            <a:off x="3340607" y="2011680"/>
+            <a:ext cx="2462783" cy="1920240"/>
+          </a:xfrm>
+          <a:prstGeom prst="roundRect">
+            <a:avLst/>
+          </a:prstGeom>
+          <a:solidFill>
+            <a:srgbClr val="C9576E"/>
+          </a:solidFill>
+          <a:ln w="15875">
+            <a:solidFill>
+              <a:srgbClr val="FFC7AC"/>
+            </a:solidFill>
+          </a:ln>
+        </p:spPr>
+        <p:style>
+          <a:lnRef idx="1">
+            <a:schemeClr val="accent1"/>
+          </a:lnRef>
+          <a:fillRef idx="3">
+            <a:schemeClr val="accent1"/>
+          </a:fillRef>
+          <a:effectRef idx="2">
+            <a:schemeClr val="accent1"/>
+          </a:effectRef>
+          <a:fontRef idx="minor">
+            <a:schemeClr val="lt1"/>
+          </a:fontRef>
+        </p:style>
+        <p:txBody>
+          <a:bodyPr rtlCol="0" anchor="ctr"/>
+          <a:lstStyle/>
+          <a:p>
+            <a:pPr algn="ctr"/>
+          </a:p>
+        </p:txBody>
+      </p:sp>
+      <p:sp>
+        <p:nvSpPr>
+          <p:cNvPr id="8" name="TextBox 7"/>
+          <p:cNvSpPr txBox="1"/>
+          <p:nvPr/>
+        </p:nvSpPr>
+        <p:spPr>
+          <a:xfrm>
+            <a:off x="3413759" y="2304288"/>
+            <a:ext cx="2316479" cy="731520"/>
+          </a:xfrm>
+          <a:prstGeom prst="rect">
+            <a:avLst/>
+          </a:prstGeom>
+          <a:noFill/>
+        </p:spPr>
+        <p:txBody>
+          <a:bodyPr wrap="square" lIns="237744" rIns="237744" tIns="237744" bIns="237744">
+            <a:spAutoFit/>
+          </a:bodyPr>
+          <a:lstStyle/>
+          <a:p>
+            <a:pPr algn="ctr">
+              <a:spcAft>
+                <a:spcPts val="408"/>
+              </a:spcAft>
+              <a:defRPr sz="3400" b="1" i="0">
+                <a:solidFill>
+                  <a:srgbClr val="FFD783"/>
+                </a:solidFill>
+                <a:latin typeface="Aptos Display"/>
+              </a:defRPr>
+            </a:pPr>
+            <a:r>
+              <a:t>7-9 hrs</a:t>
+            </a:r>
+          </a:p>
+        </p:txBody>
+      </p:sp>
+      <p:sp>
+        <p:nvSpPr>
+          <p:cNvPr id="9" name="TextBox 8"/>
+          <p:cNvSpPr txBox="1"/>
+          <p:nvPr/>
+        </p:nvSpPr>
+        <p:spPr>
+          <a:xfrm>
+            <a:off x="3413759" y="3127248"/>
+            <a:ext cx="2316479" cy="640080"/>
+          </a:xfrm>
+          <a:prstGeom prst="rect">
+            <a:avLst/>
+          </a:prstGeom>
+          <a:noFill/>
+        </p:spPr>
+        <p:txBody>
+          <a:bodyPr wrap="square" lIns="237744" rIns="237744" tIns="237744" bIns="237744">
+            <a:spAutoFit/>
+          </a:bodyPr>
+          <a:lstStyle/>
+          <a:p>
+            <a:pPr algn="ctr">
+              <a:spcAft>
+                <a:spcPts val="168"/>
+              </a:spcAft>
+              <a:defRPr sz="1400" b="0" i="0">
+                <a:solidFill>
+                  <a:srgbClr val="FFEFE0"/>
+                </a:solidFill>
+                <a:latin typeface="Aptos"/>
+              </a:defRPr>
+            </a:pPr>
+            <a:r>
+              <a:t>Adult sleep</a:t>
+            </a:r>
+          </a:p>
+        </p:txBody>
+      </p:sp>
+      <p:sp>
+        <p:nvSpPr>
+          <p:cNvPr id="10" name="Rounded Rectangle 9"/>
+          <p:cNvSpPr/>
+          <p:nvPr/>
+        </p:nvSpPr>
+        <p:spPr>
+          <a:xfrm>
+            <a:off x="6022847" y="2011680"/>
+            <a:ext cx="2462783" cy="1920240"/>
+          </a:xfrm>
+          <a:prstGeom prst="roundRect">
+            <a:avLst/>
+          </a:prstGeom>
+          <a:solidFill>
+            <a:srgbClr val="C9576E"/>
+          </a:solidFill>
+          <a:ln w="15875">
+            <a:solidFill>
+              <a:srgbClr val="FFC7AC"/>
+            </a:solidFill>
+          </a:ln>
+        </p:spPr>
+        <p:style>
+          <a:lnRef idx="1">
+            <a:schemeClr val="accent1"/>
+          </a:lnRef>
+          <a:fillRef idx="3">
+            <a:schemeClr val="accent1"/>
+          </a:fillRef>
+          <a:effectRef idx="2">
+            <a:schemeClr val="accent1"/>
+          </a:effectRef>
+          <a:fontRef idx="minor">
+            <a:schemeClr val="lt1"/>
+          </a:fontRef>
+        </p:style>
+        <p:txBody>
+          <a:bodyPr rtlCol="0" anchor="ctr"/>
+          <a:lstStyle/>
+          <a:p>
+            <a:pPr algn="ctr"/>
+          </a:p>
+        </p:txBody>
+      </p:sp>
+      <p:sp>
+        <p:nvSpPr>
+          <p:cNvPr id="11" name="TextBox 10"/>
+          <p:cNvSpPr txBox="1"/>
+          <p:nvPr/>
+        </p:nvSpPr>
+        <p:spPr>
+          <a:xfrm>
+            <a:off x="6095999" y="2304288"/>
+            <a:ext cx="2316479" cy="731520"/>
+          </a:xfrm>
+          <a:prstGeom prst="rect">
+            <a:avLst/>
+          </a:prstGeom>
+          <a:noFill/>
+        </p:spPr>
+        <p:txBody>
+          <a:bodyPr wrap="square" lIns="237744" rIns="237744" tIns="237744" bIns="237744">
+            <a:spAutoFit/>
+          </a:bodyPr>
+          <a:lstStyle/>
+          <a:p>
+            <a:pPr algn="ctr">
+              <a:spcAft>
+                <a:spcPts val="408"/>
+              </a:spcAft>
+              <a:defRPr sz="3400" b="1" i="0">
+                <a:solidFill>
+                  <a:srgbClr val="FFD783"/>
+                </a:solidFill>
+                <a:latin typeface="Aptos Display"/>
+              </a:defRPr>
+            </a:pPr>
+            <a:r>
+              <a:t>2 L</a:t>
+            </a:r>
+          </a:p>
+        </p:txBody>
+      </p:sp>
+      <p:sp>
+        <p:nvSpPr>
+          <p:cNvPr id="12" name="TextBox 11"/>
+          <p:cNvSpPr txBox="1"/>
+          <p:nvPr/>
+        </p:nvSpPr>
+        <p:spPr>
+          <a:xfrm>
+            <a:off x="6095999" y="3127248"/>
+            <a:ext cx="2316479" cy="640080"/>
+          </a:xfrm>
+          <a:prstGeom prst="rect">
+            <a:avLst/>
+          </a:prstGeom>
+          <a:noFill/>
+        </p:spPr>
+        <p:txBody>
+          <a:bodyPr wrap="square" lIns="237744" rIns="237744" tIns="237744" bIns="237744">
+            <a:spAutoFit/>
+          </a:bodyPr>
+          <a:lstStyle/>
+          <a:p>
+            <a:pPr algn="ctr">
+              <a:spcAft>
+                <a:spcPts val="168"/>
+              </a:spcAft>
+              <a:defRPr sz="1400" b="0" i="0">
+                <a:solidFill>
+                  <a:srgbClr val="FFEFE0"/>
+                </a:solidFill>
+                <a:latin typeface="Aptos"/>
+              </a:defRPr>
+            </a:pPr>
+            <a:r>
+              <a:t>Hydration target</a:t>
+            </a:r>
+          </a:p>
+        </p:txBody>
+      </p:sp>
+    </p:spTree>
+  </p:cSld>
+  <p:clrMapOvr>
+    <a:masterClrMapping/>
+  </p:clrMapOvr>
+</p:sld>
+</file>
+
+<file path=ppt/slides/slide5.xml><?xml version="1.0" encoding="utf-8"?>
+<p:sld xmlns:a="http://schemas.openxmlformats.org/drawingml/2006/main" xmlns:p="http://schemas.openxmlformats.org/presentationml/2006/main" xmlns:r="http://schemas.openxmlformats.org/officeDocument/2006/relationships">
+  <p:cSld>
+    <p:bg>
+      <p:bgPr>
+        <a:gradFill rotWithShape="1">
+          <a:gsLst>
+            <a:gs pos="0">
+              <a:srgbClr val="F87054"/>
+            </a:gs>
+            <a:gs pos="100000">
+              <a:srgbClr val="B03675"/>
+            </a:gs>
+          </a:gsLst>
+          <a:lin scaled="0" ang="5400000"/>
+        </a:gradFill>
+        <a:effectLst/>
+      </p:bgPr>
+    </p:bg>
+    <p:spTree>
+      <p:nvGrpSpPr>
+        <p:cNvPr id="1" name=""/>
+        <p:cNvGrpSpPr/>
+        <p:nvPr/>
+      </p:nvGrpSpPr>
+      <p:grpSpPr/>
+      <p:sp>
+        <p:nvSpPr>
+          <p:cNvPr id="2" name="TextBox 1"/>
+          <p:cNvSpPr txBox="1"/>
+          <p:nvPr/>
+        </p:nvSpPr>
+        <p:spPr>
+          <a:xfrm>
+            <a:off x="640080" y="411480"/>
+            <a:ext cx="7498079" cy="1645920"/>
+          </a:xfrm>
+          <a:prstGeom prst="rect">
+            <a:avLst/>
+          </a:prstGeom>
+          <a:noFill/>
+        </p:spPr>
+        <p:txBody>
+          <a:bodyPr wrap="square" lIns="237744" rIns="237744" tIns="237744" bIns="237744">
+            <a:spAutoFit/>
+          </a:bodyPr>
+          <a:lstStyle/>
+          <a:p>
+            <a:pPr>
+              <a:spcAft>
+                <a:spcPts val="140"/>
+              </a:spcAft>
+              <a:defRPr sz="2800" b="1" i="0">
+                <a:solidFill>
+                  <a:srgbClr val="FFFFFF"/>
+                </a:solidFill>
+                <a:latin typeface="Aptos Display"/>
+              </a:defRPr>
+            </a:pPr>
+            <a:r>
+              <a:t>Simple daily system</a:t>
+            </a:r>
+          </a:p>
+        </p:txBody>
+      </p:sp>
+      <p:sp>
+        <p:nvSpPr>
+          <p:cNvPr id="3" name="Rectangle 2"/>
+          <p:cNvSpPr/>
+          <p:nvPr/>
+        </p:nvSpPr>
+        <p:spPr>
+          <a:xfrm>
+            <a:off x="640080" y="1197863"/>
+            <a:ext cx="1371600" cy="45720"/>
+          </a:xfrm>
+          <a:prstGeom prst="rect">
+            <a:avLst/>
+          </a:prstGeom>
+          <a:solidFill>
+            <a:srgbClr val="FFD783"/>
+          </a:solidFill>
+          <a:ln>
+            <a:noFill/>
+          </a:ln>
+        </p:spPr>
+        <p:style>
+          <a:lnRef idx="1">
+            <a:schemeClr val="accent1"/>
+          </a:lnRef>
+          <a:fillRef idx="3">
+            <a:schemeClr val="accent1"/>
+          </a:fillRef>
+          <a:effectRef idx="2">
+            <a:schemeClr val="accent1"/>
+          </a:effectRef>
+          <a:fontRef idx="minor">
+            <a:schemeClr val="lt1"/>
+          </a:fontRef>
+        </p:style>
+        <p:txBody>
+          <a:bodyPr rtlCol="0" anchor="ctr"/>
+          <a:lstStyle/>
+          <a:p>
+            <a:pPr algn="ctr"/>
+          </a:p>
+        </p:txBody>
+      </p:sp>
+      <p:sp>
+        <p:nvSpPr>
+          <p:cNvPr id="4" name="Rounded Rectangle 3"/>
+          <p:cNvSpPr/>
+          <p:nvPr/>
+        </p:nvSpPr>
+        <p:spPr>
+          <a:xfrm>
+            <a:off x="658368" y="1280160"/>
+            <a:ext cx="3758183" cy="5029200"/>
+          </a:xfrm>
+          <a:prstGeom prst="roundRect">
+            <a:avLst/>
+          </a:prstGeom>
+          <a:solidFill>
+            <a:srgbClr val="C9576E"/>
+          </a:solidFill>
+          <a:ln w="15875">
+            <a:solidFill>
+              <a:srgbClr val="FFC7AC"/>
+            </a:solidFill>
+          </a:ln>
+        </p:spPr>
+        <p:style>
+          <a:lnRef idx="1">
+            <a:schemeClr val="accent1"/>
+          </a:lnRef>
+          <a:fillRef idx="3">
+            <a:schemeClr val="accent1"/>
+          </a:fillRef>
+          <a:effectRef idx="2">
+            <a:schemeClr val="accent1"/>
+          </a:effectRef>
+          <a:fontRef idx="minor">
+            <a:schemeClr val="lt1"/>
+          </a:fontRef>
+        </p:style>
+        <p:txBody>
+          <a:bodyPr rtlCol="0" anchor="ctr"/>
+          <a:lstStyle/>
+          <a:p>
+            <a:pPr algn="ctr"/>
+          </a:p>
+        </p:txBody>
+      </p:sp>
+      <p:sp>
+        <p:nvSpPr>
+          <p:cNvPr id="5" name="Rounded Rectangle 4"/>
+          <p:cNvSpPr/>
+          <p:nvPr/>
+        </p:nvSpPr>
+        <p:spPr>
+          <a:xfrm>
+            <a:off x="4727447" y="1280160"/>
+            <a:ext cx="3758183" cy="5029200"/>
+          </a:xfrm>
+          <a:prstGeom prst="roundRect">
+            <a:avLst/>
+          </a:prstGeom>
+          <a:solidFill>
+            <a:srgbClr val="C9576E"/>
+          </a:solidFill>
+          <a:ln w="15875">
+            <a:solidFill>
+              <a:srgbClr val="FFC7AC"/>
+            </a:solidFill>
+          </a:ln>
+        </p:spPr>
+        <p:style>
+          <a:lnRef idx="1">
+            <a:schemeClr val="accent1"/>
+          </a:lnRef>
+          <a:fillRef idx="3">
+            <a:schemeClr val="accent1"/>
+          </a:fillRef>
+          <a:effectRef idx="2">
+            <a:schemeClr val="accent1"/>
+          </a:effectRef>
+          <a:fontRef idx="minor">
+            <a:schemeClr val="lt1"/>
+          </a:fontRef>
+        </p:style>
+        <p:txBody>
+          <a:bodyPr rtlCol="0" anchor="ctr"/>
+          <a:lstStyle/>
+          <a:p>
+            <a:pPr algn="ctr"/>
+          </a:p>
+        </p:txBody>
+      </p:sp>
+      <p:sp>
+        <p:nvSpPr>
+          <p:cNvPr id="6" name="TextBox 5"/>
+          <p:cNvSpPr txBox="1"/>
+          <p:nvPr/>
+        </p:nvSpPr>
+        <p:spPr>
+          <a:xfrm>
+            <a:off x="731519" y="1353312"/>
+            <a:ext cx="3611879" cy="411480"/>
+          </a:xfrm>
+          <a:prstGeom prst="rect">
+            <a:avLst/>
+          </a:prstGeom>
+          <a:noFill/>
+        </p:spPr>
+        <p:txBody>
+          <a:bodyPr wrap="square" lIns="237744" rIns="237744" tIns="237744" bIns="237744">
+            <a:spAutoFit/>
+          </a:bodyPr>
+          <a:lstStyle/>
+          <a:p>
+            <a:pPr>
+              <a:spcAft>
+                <a:spcPts val="216"/>
+              </a:spcAft>
+              <a:defRPr sz="1800" b="1" i="0">
+                <a:solidFill>
+                  <a:srgbClr val="FFD783"/>
+                </a:solidFill>
+                <a:latin typeface="Aptos"/>
+              </a:defRPr>
+            </a:pPr>
+            <a:r>
+              <a:t>Morning</a:t>
+            </a:r>
+          </a:p>
+        </p:txBody>
+      </p:sp>
+      <p:sp>
+        <p:nvSpPr>
+          <p:cNvPr id="7" name="TextBox 6"/>
+          <p:cNvSpPr txBox="1"/>
+          <p:nvPr/>
+        </p:nvSpPr>
+        <p:spPr>
+          <a:xfrm>
+            <a:off x="4800599" y="1353312"/>
+            <a:ext cx="3611879" cy="411480"/>
+          </a:xfrm>
+          <a:prstGeom prst="rect">
+            <a:avLst/>
+          </a:prstGeom>
+          <a:noFill/>
+        </p:spPr>
+        <p:txBody>
+          <a:bodyPr wrap="square" lIns="237744" rIns="237744" tIns="237744" bIns="237744">
+            <a:spAutoFit/>
+          </a:bodyPr>
+          <a:lstStyle/>
+          <a:p>
+            <a:pPr>
+              <a:spcAft>
+                <a:spcPts val="216"/>
+              </a:spcAft>
+              <a:defRPr sz="1800" b="1" i="0">
+                <a:solidFill>
+                  <a:srgbClr val="FFD783"/>
+                </a:solidFill>
+                <a:latin typeface="Aptos"/>
+              </a:defRPr>
+            </a:pPr>
+            <a:r>
+              <a:t>Evening</a:t>
+            </a:r>
+          </a:p>
+        </p:txBody>
+      </p:sp>
+      <p:sp>
+        <p:nvSpPr>
+          <p:cNvPr id="8" name="TextBox 7"/>
+          <p:cNvSpPr txBox="1"/>
+          <p:nvPr/>
+        </p:nvSpPr>
+        <p:spPr>
+          <a:xfrm>
+            <a:off x="731519" y="1810512"/>
+            <a:ext cx="3611879" cy="4425696"/>
+          </a:xfrm>
+          <a:prstGeom prst="rect">
+            <a:avLst/>
+          </a:prstGeom>
+          <a:noFill/>
+        </p:spPr>
+        <p:txBody>
+          <a:bodyPr wrap="square" lIns="237744" rIns="237744" tIns="237744" bIns="237744">
+            <a:spAutoFit/>
+          </a:bodyPr>
+          <a:lstStyle/>
+          <a:p>
+            <a:pPr>
+              <a:spcAft>
+                <a:spcPts val="180"/>
+              </a:spcAft>
+              <a:defRPr sz="1800" b="0" i="0">
+                <a:solidFill>
+                  <a:srgbClr val="FFEFE0"/>
+                </a:solidFill>
+                <a:latin typeface="Aptos"/>
+              </a:defRPr>
+            </a:pPr>
+            <a:r>
+              <a:t>Wake at one time</a:t>
+            </a:r>
+          </a:p>
+          <a:p>
+            <a:pPr>
+              <a:spcAft>
+                <a:spcPts val="180"/>
+              </a:spcAft>
+              <a:defRPr sz="1800" b="0" i="0">
+                <a:solidFill>
+                  <a:srgbClr val="FFEFE0"/>
+                </a:solidFill>
+                <a:latin typeface="Aptos"/>
+              </a:defRPr>
+            </a:pPr>
+            <a:r>
+              <a:t>Hydrate before caffeine</a:t>
+            </a:r>
+          </a:p>
+          <a:p>
+            <a:pPr>
+              <a:spcAft>
+                <a:spcPts val="180"/>
+              </a:spcAft>
+              <a:defRPr sz="1800" b="0" i="0">
+                <a:solidFill>
+                  <a:srgbClr val="FFEFE0"/>
+                </a:solidFill>
+                <a:latin typeface="Aptos"/>
+              </a:defRPr>
+            </a:pPr>
+            <a:r>
+              <a:t>Move before messages</a:t>
+            </a:r>
+          </a:p>
+        </p:txBody>
+      </p:sp>
+      <p:sp>
+        <p:nvSpPr>
+          <p:cNvPr id="9" name="TextBox 8"/>
+          <p:cNvSpPr txBox="1"/>
+          <p:nvPr/>
+        </p:nvSpPr>
+        <p:spPr>
+          <a:xfrm>
+            <a:off x="4800599" y="1810512"/>
+            <a:ext cx="3611879" cy="4425696"/>
+          </a:xfrm>
+          <a:prstGeom prst="rect">
+            <a:avLst/>
+          </a:prstGeom>
+          <a:noFill/>
+        </p:spPr>
+        <p:txBody>
+          <a:bodyPr wrap="square" lIns="237744" rIns="237744" tIns="237744" bIns="237744">
+            <a:spAutoFit/>
+          </a:bodyPr>
+          <a:lstStyle/>
+          <a:p>
+            <a:pPr>
+              <a:spcAft>
+                <a:spcPts val="180"/>
+              </a:spcAft>
+              <a:defRPr sz="1800" b="0" i="0">
+                <a:solidFill>
+                  <a:srgbClr val="FFEFE0"/>
+                </a:solidFill>
+                <a:latin typeface="Aptos"/>
+              </a:defRPr>
+            </a:pPr>
+            <a:r>
+              <a:t>End meals earlier</a:t>
+            </a:r>
+          </a:p>
+          <a:p>
+            <a:pPr>
+              <a:spcAft>
+                <a:spcPts val="180"/>
+              </a:spcAft>
+              <a:defRPr sz="1800" b="0" i="0">
+                <a:solidFill>
+                  <a:srgbClr val="FFEFE0"/>
+                </a:solidFill>
+                <a:latin typeface="Aptos"/>
+              </a:defRPr>
+            </a:pPr>
+            <a:r>
+              <a:t>Reduce bright light</a:t>
+            </a:r>
+          </a:p>
+          <a:p>
+            <a:pPr>
+              <a:spcAft>
+                <a:spcPts val="180"/>
+              </a:spcAft>
+              <a:defRPr sz="1800" b="0" i="0">
+                <a:solidFill>
+                  <a:srgbClr val="FFEFE0"/>
+                </a:solidFill>
+                <a:latin typeface="Aptos"/>
+              </a:defRPr>
+            </a:pPr>
+            <a:r>
+              <a:t>Use one fixed wind-down ritual</a:t>
+            </a:r>
+          </a:p>
+        </p:txBody>
+      </p:sp>
+    </p:spTree>
+  </p:cSld>
+  <p:clrMapOvr>
+    <a:masterClrMapping/>
+  </p:clrMapOvr>
+</p:sld>
+</file>
+
+<file path=ppt/slides/slide6.xml><?xml version="1.0" encoding="utf-8"?>
+<p:sld xmlns:a="http://schemas.openxmlformats.org/drawingml/2006/main" xmlns:p="http://schemas.openxmlformats.org/presentationml/2006/main" xmlns:r="http://schemas.openxmlformats.org/officeDocument/2006/relationships">
+  <p:cSld>
+    <p:bg>
+      <p:bgPr>
+        <a:gradFill rotWithShape="1">
+          <a:gsLst>
+            <a:gs pos="0">
+              <a:srgbClr val="F87054"/>
+            </a:gs>
+            <a:gs pos="100000">
+              <a:srgbClr val="B03675"/>
+            </a:gs>
+          </a:gsLst>
+          <a:lin scaled="0" ang="5400000"/>
+        </a:gradFill>
+        <a:effectLst/>
+      </p:bgPr>
+    </p:bg>
+    <p:spTree>
+      <p:nvGrpSpPr>
+        <p:cNvPr id="1" name=""/>
+        <p:cNvGrpSpPr/>
+        <p:nvPr/>
+      </p:nvGrpSpPr>
+      <p:grpSpPr/>
+      <p:pic>
+        <p:nvPicPr>
+          <p:cNvPr id="2" name="Picture 1" descr="tmp32xciuw1.png"/>
+          <p:cNvPicPr>
+            <a:picLocks noChangeAspect="1"/>
+          </p:cNvPicPr>
+          <p:nvPr/>
+        </p:nvPicPr>
+        <p:blipFill>
+          <a:blip r:embed="rId2"/>
+          <a:stretch>
+            <a:fillRect/>
+          </a:stretch>
+        </p:blipFill>
+        <p:spPr>
+          <a:xfrm>
+            <a:off x="0" y="0"/>
+            <a:ext cx="9144000" cy="6858000"/>
+          </a:xfrm>
+          <a:prstGeom prst="rect">
+            <a:avLst/>
+          </a:prstGeom>
+        </p:spPr>
+      </p:pic>
+      <p:sp>
+        <p:nvSpPr>
+          <p:cNvPr id="3" name="Rectangle 2"/>
+          <p:cNvSpPr/>
+          <p:nvPr/>
+        </p:nvSpPr>
+        <p:spPr>
+          <a:xfrm>
+            <a:off x="0" y="0"/>
+            <a:ext cx="9144000" cy="6858000"/>
+          </a:xfrm>
+          <a:prstGeom prst="rect">
+            <a:avLst/>
+          </a:prstGeom>
+          <a:solidFill>
+            <a:srgbClr val="080C12"/>
+          </a:solidFill>
+          <a:ln>
+            <a:noFill/>
+          </a:ln>
+        </p:spPr>
+        <p:style>
+          <a:lnRef idx="1">
+            <a:schemeClr val="accent1"/>
+          </a:lnRef>
+          <a:fillRef idx="3">
+            <a:schemeClr val="accent1"/>
+          </a:fillRef>
+          <a:effectRef idx="2">
+            <a:schemeClr val="accent1"/>
+          </a:effectRef>
+          <a:fontRef idx="minor">
+            <a:schemeClr val="lt1"/>
+          </a:fontRef>
+        </p:style>
+        <p:txBody>
+          <a:bodyPr rtlCol="0" anchor="ctr"/>
+          <a:lstStyle/>
+          <a:p>
+            <a:pPr algn="ctr"/>
+          </a:p>
+        </p:txBody>
+      </p:sp>
+      <p:sp>
+        <p:nvSpPr>
+          <p:cNvPr id="4" name="TextBox 3"/>
+          <p:cNvSpPr txBox="1"/>
+          <p:nvPr/>
+        </p:nvSpPr>
+        <p:spPr>
+          <a:xfrm>
+            <a:off x="640080" y="4389120"/>
+            <a:ext cx="7863840" cy="1097280"/>
+          </a:xfrm>
+          <a:prstGeom prst="rect">
+            <a:avLst/>
+          </a:prstGeom>
+          <a:noFill/>
+        </p:spPr>
+        <p:txBody>
+          <a:bodyPr wrap="square" lIns="237744" rIns="237744" tIns="237744" bIns="237744">
+            <a:spAutoFit/>
+          </a:bodyPr>
+          <a:lstStyle/>
+          <a:p>
+            <a:pPr>
+              <a:spcAft>
+                <a:spcPts val="527"/>
+              </a:spcAft>
+              <a:defRPr sz="4400" b="1" i="0">
+                <a:solidFill>
+                  <a:srgbClr val="FFFFFF"/>
+                </a:solidFill>
+                <a:latin typeface="Aptos Display"/>
+              </a:defRPr>
+            </a:pPr>
+            <a:r>
+              <a:t>Recovery matters too</a:t>
+            </a:r>
+          </a:p>
+        </p:txBody>
+      </p:sp>
+      <p:sp>
+        <p:nvSpPr>
+          <p:cNvPr id="5" name="TextBox 4"/>
+          <p:cNvSpPr txBox="1"/>
+          <p:nvPr/>
+        </p:nvSpPr>
+        <p:spPr>
+          <a:xfrm>
+            <a:off x="640080" y="6144768"/>
+            <a:ext cx="7863840" cy="274320"/>
+          </a:xfrm>
+          <a:prstGeom prst="rect">
+            <a:avLst/>
+          </a:prstGeom>
+          <a:noFill/>
+        </p:spPr>
+        <p:txBody>
+          <a:bodyPr wrap="square" lIns="237744" rIns="237744" tIns="237744" bIns="237744">
+            <a:spAutoFit/>
+          </a:bodyPr>
+          <a:lstStyle/>
+          <a:p>
+            <a:pPr>
+              <a:spcAft>
+                <a:spcPts val="144"/>
+              </a:spcAft>
+              <a:defRPr sz="1200" b="0" i="0">
+                <a:solidFill>
+                  <a:srgbClr val="F4F7FA"/>
+                </a:solidFill>
+                <a:latin typeface="Aptos"/>
+              </a:defRPr>
+            </a:pPr>
+            <a:r>
+              <a:t>A lower-density slide keeps the deck from feeling like a wellness checklist</a:t>
+            </a:r>
+          </a:p>
+        </p:txBody>
+      </p:sp>
+    </p:spTree>
+  </p:cSld>
+  <p:clrMapOvr>
+    <a:masterClrMapping/>
+  </p:clrMapOvr>
+</p:sld>
+</file>
+
+<file path=ppt/slides/slide7.xml><?xml version="1.0" encoding="utf-8"?>
+<p:sld xmlns:a="http://schemas.openxmlformats.org/drawingml/2006/main" xmlns:p="http://schemas.openxmlformats.org/presentationml/2006/main" xmlns:r="http://schemas.openxmlformats.org/officeDocument/2006/relationships">
+  <p:cSld>
+    <p:bg>
+      <p:bgPr>
+        <a:gradFill rotWithShape="1">
+          <a:gsLst>
+            <a:gs pos="0">
+              <a:srgbClr val="F87054"/>
+            </a:gs>
+            <a:gs pos="100000">
+              <a:srgbClr val="B03675"/>
+            </a:gs>
+          </a:gsLst>
+          <a:lin scaled="0" ang="5400000"/>
+        </a:gradFill>
+        <a:effectLst/>
+      </p:bgPr>
+    </p:bg>
+    <p:spTree>
+      <p:nvGrpSpPr>
+        <p:cNvPr id="1" name=""/>
+        <p:cNvGrpSpPr/>
+        <p:nvPr/>
+      </p:nvGrpSpPr>
+      <p:grpSpPr/>
+      <p:sp>
+        <p:nvSpPr>
+          <p:cNvPr id="2" name="Rounded Rectangle 1"/>
+          <p:cNvSpPr/>
+          <p:nvPr/>
+        </p:nvSpPr>
+        <p:spPr>
+          <a:xfrm>
+            <a:off x="914400" y="1097280"/>
+            <a:ext cx="7315200" cy="4389120"/>
+          </a:xfrm>
+          <a:prstGeom prst="roundRect">
+            <a:avLst/>
+          </a:prstGeom>
+          <a:solidFill>
+            <a:srgbClr val="C9576E"/>
+          </a:solidFill>
+          <a:ln w="15875">
+            <a:solidFill>
+              <a:srgbClr val="FFC7AC"/>
+            </a:solidFill>
+          </a:ln>
+        </p:spPr>
+        <p:style>
+          <a:lnRef idx="1">
+            <a:schemeClr val="accent1"/>
+          </a:lnRef>
+          <a:fillRef idx="3">
+            <a:schemeClr val="accent1"/>
+          </a:fillRef>
+          <a:effectRef idx="2">
+            <a:schemeClr val="accent1"/>
+          </a:effectRef>
+          <a:fontRef idx="minor">
+            <a:schemeClr val="lt1"/>
+          </a:fontRef>
+        </p:style>
+        <p:txBody>
+          <a:bodyPr rtlCol="0" anchor="ctr"/>
+          <a:lstStyle/>
+          <a:p>
+            <a:pPr algn="ctr"/>
+          </a:p>
+        </p:txBody>
+      </p:sp>
+      <p:sp>
+        <p:nvSpPr>
+          <p:cNvPr id="3" name="TextBox 2"/>
+          <p:cNvSpPr txBox="1"/>
+          <p:nvPr/>
+        </p:nvSpPr>
+        <p:spPr>
+          <a:xfrm>
+            <a:off x="1143000" y="1325880"/>
+            <a:ext cx="914400" cy="914400"/>
+          </a:xfrm>
+          <a:prstGeom prst="rect">
+            <a:avLst/>
+          </a:prstGeom>
+          <a:noFill/>
+        </p:spPr>
+        <p:txBody>
+          <a:bodyPr wrap="square" lIns="237744" rIns="237744" tIns="237744" bIns="237744">
+            <a:spAutoFit/>
+          </a:bodyPr>
+          <a:lstStyle/>
+          <a:p>
+            <a:pPr>
+              <a:spcAft>
+                <a:spcPts val="1104"/>
+              </a:spcAft>
+              <a:defRPr sz="9200" b="1" i="0">
+                <a:solidFill>
+                  <a:srgbClr val="FFD783"/>
+                </a:solidFill>
+                <a:latin typeface="Aptos Display"/>
+              </a:defRPr>
+            </a:pPr>
+            <a:r>
+              <a:t>“</a:t>
+            </a:r>
+          </a:p>
+        </p:txBody>
+      </p:sp>
+      <p:sp>
+        <p:nvSpPr>
+          <p:cNvPr id="4" name="TextBox 3"/>
+          <p:cNvSpPr txBox="1"/>
+          <p:nvPr/>
+        </p:nvSpPr>
+        <p:spPr>
+          <a:xfrm>
+            <a:off x="1828800" y="1828800"/>
+            <a:ext cx="6309360" cy="2286000"/>
+          </a:xfrm>
+          <a:prstGeom prst="rect">
+            <a:avLst/>
+          </a:prstGeom>
+          <a:noFill/>
+        </p:spPr>
+        <p:txBody>
+          <a:bodyPr wrap="square" lIns="237744" rIns="237744" tIns="237744" bIns="237744">
+            <a:spAutoFit/>
+          </a:bodyPr>
+          <a:lstStyle/>
+          <a:p>
+            <a:pPr>
+              <a:spcAft>
+                <a:spcPts val="156"/>
+              </a:spcAft>
+              <a:defRPr sz="2600" b="0" i="1">
+                <a:solidFill>
+                  <a:srgbClr val="FFFFFF"/>
+                </a:solidFill>
+                <a:latin typeface="Aptos Display"/>
+              </a:defRPr>
+            </a:pPr>
+            <a:r>
+              <a:t>Consistency compounds faster than intensity.</a:t>
+            </a:r>
+          </a:p>
+        </p:txBody>
+      </p:sp>
+      <p:sp>
+        <p:nvSpPr>
+          <p:cNvPr id="5" name="TextBox 4"/>
+          <p:cNvSpPr txBox="1"/>
+          <p:nvPr/>
+        </p:nvSpPr>
+        <p:spPr>
+          <a:xfrm>
+            <a:off x="1828800" y="4572000"/>
+            <a:ext cx="6309360" cy="457200"/>
+          </a:xfrm>
+          <a:prstGeom prst="rect">
+            <a:avLst/>
+          </a:prstGeom>
+          <a:noFill/>
+        </p:spPr>
+        <p:txBody>
+          <a:bodyPr wrap="square" lIns="237744" rIns="237744" tIns="237744" bIns="237744">
+            <a:spAutoFit/>
+          </a:bodyPr>
+          <a:lstStyle/>
+          <a:p>
+            <a:pPr>
+              <a:spcAft>
+                <a:spcPts val="216"/>
+              </a:spcAft>
+              <a:defRPr sz="1800" b="0" i="0">
+                <a:solidFill>
+                  <a:srgbClr val="FFD7C8"/>
+                </a:solidFill>
+                <a:latin typeface="Aptos"/>
+              </a:defRPr>
+            </a:pPr>
+            <a:r>
+              <a:t>— AutoPPT Sample Desk, Healthy Living Notes</a:t>
+            </a:r>
+          </a:p>
+        </p:txBody>
+      </p:sp>
+    </p:spTree>
+  </p:cSld>
+  <p:clrMapOvr>
+    <a:masterClrMapping/>
+  </p:clrMapOvr>
+</p:sld>
+</file>
+
+<file path=ppt/slides/slide8.xml><?xml version="1.0" encoding="utf-8"?>
+<p:sld xmlns:a="http://schemas.openxmlformats.org/drawingml/2006/main" xmlns:p="http://schemas.openxmlformats.org/presentationml/2006/main" xmlns:r="http://schemas.openxmlformats.org/officeDocument/2006/relationships">
+  <p:cSld>
+    <p:bg>
+      <p:bgPr>
+        <a:gradFill rotWithShape="1">
+          <a:gsLst>
+            <a:gs pos="0">
+              <a:srgbClr val="F87054"/>
+            </a:gs>
+            <a:gs pos="100000">
+              <a:srgbClr val="B03675"/>
+            </a:gs>
+          </a:gsLst>
+          <a:lin scaled="0" ang="5400000"/>
+        </a:gradFill>
+        <a:effectLst/>
+      </p:bgPr>
+    </p:bg>
+    <p:spTree>
+      <p:nvGrpSpPr>
+        <p:cNvPr id="1" name=""/>
+        <p:cNvGrpSpPr/>
+        <p:nvPr/>
+      </p:nvGrpSpPr>
+      <p:grpSpPr/>
+      <p:sp>
+        <p:nvSpPr>
+          <p:cNvPr id="2" name="TextBox 1"/>
+          <p:cNvSpPr txBox="1"/>
+          <p:nvPr/>
+        </p:nvSpPr>
+        <p:spPr>
+          <a:xfrm>
+            <a:off x="640080" y="411480"/>
+            <a:ext cx="7498079" cy="1645920"/>
+          </a:xfrm>
+          <a:prstGeom prst="rect">
+            <a:avLst/>
+          </a:prstGeom>
+          <a:noFill/>
+        </p:spPr>
+        <p:txBody>
+          <a:bodyPr wrap="square" lIns="237744" rIns="237744" tIns="237744" bIns="237744">
+            <a:spAutoFit/>
+          </a:bodyPr>
+          <a:lstStyle/>
+          <a:p>
+            <a:pPr>
+              <a:spcAft>
+                <a:spcPts val="140"/>
+              </a:spcAft>
+              <a:defRPr sz="2800" b="1" i="0">
+                <a:solidFill>
+                  <a:srgbClr val="FFFFFF"/>
+                </a:solidFill>
+                <a:latin typeface="Aptos Display"/>
+              </a:defRPr>
+            </a:pPr>
             <a:r>
               <a:t>References</a:t>
             </a:r>
@@ -3802,41 +5228,143 @@
       </p:sp>
       <p:sp>
         <p:nvSpPr>
-          <p:cNvPr id="3" name="Content Placeholder 2"/>
-          <p:cNvSpPr>
-            <a:spLocks noGrp="1"/>
-          </p:cNvSpPr>
-          <p:nvPr>
-            <p:ph idx="1"/>
-          </p:nvPr>
-        </p:nvSpPr>
-        <p:spPr/>
-        <p:txBody>
-          <a:bodyPr/>
-          <a:lstStyle/>
-          <a:p/>
+          <p:cNvPr id="3" name="Rectangle 2"/>
+          <p:cNvSpPr/>
+          <p:nvPr/>
+        </p:nvSpPr>
+        <p:spPr>
+          <a:xfrm>
+            <a:off x="640080" y="1197863"/>
+            <a:ext cx="1371600" cy="45720"/>
+          </a:xfrm>
+          <a:prstGeom prst="rect">
+            <a:avLst/>
+          </a:prstGeom>
+          <a:solidFill>
+            <a:srgbClr val="FFD783"/>
+          </a:solidFill>
+          <a:ln>
+            <a:noFill/>
+          </a:ln>
+        </p:spPr>
+        <p:style>
+          <a:lnRef idx="1">
+            <a:schemeClr val="accent1"/>
+          </a:lnRef>
+          <a:fillRef idx="3">
+            <a:schemeClr val="accent1"/>
+          </a:fillRef>
+          <a:effectRef idx="2">
+            <a:schemeClr val="accent1"/>
+          </a:effectRef>
+          <a:fontRef idx="minor">
+            <a:schemeClr val="lt1"/>
+          </a:fontRef>
+        </p:style>
+        <p:txBody>
+          <a:bodyPr rtlCol="0" anchor="ctr"/>
+          <a:lstStyle/>
+          <a:p>
+            <a:pPr algn="ctr"/>
+          </a:p>
+        </p:txBody>
+      </p:sp>
+      <p:sp>
+        <p:nvSpPr>
+          <p:cNvPr id="4" name="Rounded Rectangle 3"/>
+          <p:cNvSpPr/>
+          <p:nvPr/>
+        </p:nvSpPr>
+        <p:spPr>
+          <a:xfrm>
+            <a:off x="658368" y="1280160"/>
+            <a:ext cx="7827263" cy="5029200"/>
+          </a:xfrm>
+          <a:prstGeom prst="roundRect">
+            <a:avLst/>
+          </a:prstGeom>
+          <a:solidFill>
+            <a:srgbClr val="C9576E"/>
+          </a:solidFill>
+          <a:ln w="15875">
+            <a:solidFill>
+              <a:srgbClr val="FFC7AC"/>
+            </a:solidFill>
+          </a:ln>
+        </p:spPr>
+        <p:style>
+          <a:lnRef idx="1">
+            <a:schemeClr val="accent1"/>
+          </a:lnRef>
+          <a:fillRef idx="3">
+            <a:schemeClr val="accent1"/>
+          </a:fillRef>
+          <a:effectRef idx="2">
+            <a:schemeClr val="accent1"/>
+          </a:effectRef>
+          <a:fontRef idx="minor">
+            <a:schemeClr val="lt1"/>
+          </a:fontRef>
+        </p:style>
+        <p:txBody>
+          <a:bodyPr rtlCol="0" anchor="ctr"/>
+          <a:lstStyle/>
+          <a:p>
+            <a:pPr algn="ctr"/>
+          </a:p>
+        </p:txBody>
+      </p:sp>
+      <p:sp>
+        <p:nvSpPr>
+          <p:cNvPr id="5" name="TextBox 4"/>
+          <p:cNvSpPr txBox="1"/>
+          <p:nvPr/>
+        </p:nvSpPr>
+        <p:spPr>
+          <a:xfrm>
+            <a:off x="731519" y="1353312"/>
+            <a:ext cx="7680959" cy="4882896"/>
+          </a:xfrm>
+          <a:prstGeom prst="rect">
+            <a:avLst/>
+          </a:prstGeom>
+          <a:noFill/>
+        </p:spPr>
+        <p:txBody>
+          <a:bodyPr wrap="square" lIns="237744" rIns="237744" tIns="237744" bIns="237744">
+            <a:spAutoFit/>
+          </a:bodyPr>
+          <a:lstStyle/>
           <a:p>
             <a:pPr>
-              <a:defRPr sz="1200"/>
+              <a:spcAft>
+                <a:spcPts val="44"/>
+              </a:spcAft>
+              <a:defRPr sz="1100" b="0" i="0">
+                <a:solidFill>
+                  <a:srgbClr val="FFEFE0"/>
+                </a:solidFill>
+                <a:latin typeface="Aptos"/>
+              </a:defRPr>
             </a:pPr>
             <a:r>
-              <a:t>https://en.wikipedia.org/wiki/Autophagy</a:t>
+              <a:t>https://www.who.int/news-room/fact-sheets/detail/physical-activity</a:t>
             </a:r>
           </a:p>
           <a:p>
             <a:pPr>
-              <a:defRPr sz="1200"/>
+              <a:spcAft>
+                <a:spcPts val="44"/>
+              </a:spcAft>
+              <a:defRPr sz="1100" b="0" i="0">
+                <a:solidFill>
+                  <a:srgbClr val="FFEFE0"/>
+                </a:solidFill>
+                <a:latin typeface="Aptos"/>
+              </a:defRPr>
             </a:pPr>
             <a:r>
-              <a:t>https://www.nobelprize.org/prizes/medicine/2016/press-release/</a:t>
-            </a:r>
-          </a:p>
-          <a:p>
-            <a:pPr>
-              <a:defRPr sz="1200"/>
-            </a:pPr>
-            <a:r>
-              <a:t>https://www.health.harvard.edu/staying-healthy/the-importance-of-sleep</a:t>
+              <a:t>https://www.cdc.gov/sleep/about/index.html</a:t>
             </a:r>
           </a:p>
         </p:txBody>
@@ -4167,324 +5695,4 @@
   </a:objectDefaults>
   <a:extraClrSchemeLst/>
 </a:theme>
-</file>
-
-<file path=ppt/theme/theme2.xml><?xml version="1.0" encoding="utf-8"?>
-<a:theme xmlns:a="http://schemas.openxmlformats.org/drawingml/2006/main" name="Office Theme">
-  <a:themeElements>
-    <a:clrScheme name="Office">
-      <a:dk1>
-        <a:sysClr val="windowText" lastClr="000000"/>
-      </a:dk1>
-      <a:lt1>
-        <a:sysClr val="window" lastClr="FFFFFF"/>
-      </a:lt1>
-      <a:dk2>
-        <a:srgbClr val="1F497D"/>
-      </a:dk2>
-      <a:lt2>
-        <a:srgbClr val="EEECE1"/>
-      </a:lt2>
-      <a:accent1>
-        <a:srgbClr val="4F81BD"/>
-      </a:accent1>
-      <a:accent2>
-        <a:srgbClr val="C0504D"/>
-      </a:accent2>
-      <a:accent3>
-        <a:srgbClr val="9BBB59"/>
-      </a:accent3>
-      <a:accent4>
-        <a:srgbClr val="8064A2"/>
-      </a:accent4>
-      <a:accent5>
-        <a:srgbClr val="4BACC6"/>
-      </a:accent5>
-      <a:accent6>
-        <a:srgbClr val="F79646"/>
-      </a:accent6>
-      <a:hlink>
-        <a:srgbClr val="0000FF"/>
-      </a:hlink>
-      <a:folHlink>
-        <a:srgbClr val="800080"/>
-      </a:folHlink>
-    </a:clrScheme>
-    <a:fontScheme name="Office">
-      <a:majorFont>
-        <a:latin typeface="Calibri"/>
-        <a:ea typeface=""/>
-        <a:cs typeface=""/>
-        <a:font script="Jpan" typeface="ＭＳ Ｐゴシック"/>
-        <a:font script="Hang" typeface="맑은 고딕"/>
-        <a:font script="Hans" typeface="宋体"/>
-        <a:font script="Hant" typeface="新細明體"/>
-        <a:font script="Arab" typeface="Times New Roman"/>
-        <a:font script="Hebr" typeface="Times New Roman"/>
-        <a:font script="Thai" typeface="Angsana New"/>
-        <a:font script="Ethi" typeface="Nyala"/>
-        <a:font script="Beng" typeface="Vrinda"/>
-        <a:font script="Gujr" typeface="Shruti"/>
-        <a:font script="Khmr" typeface="MoolBoran"/>
-        <a:font script="Knda" typeface="Tunga"/>
-        <a:font script="Guru" typeface="Raavi"/>
-        <a:font script="Cans" typeface="Euphemia"/>
-        <a:font script="Cher" typeface="Plantagenet Cherokee"/>
-        <a:font script="Yiii" typeface="Microsoft Yi Baiti"/>
-        <a:font script="Tibt" typeface="Microsoft Himalaya"/>
-        <a:font script="Thaa" typeface="MV Boli"/>
-        <a:font script="Deva" typeface="Mangal"/>
-        <a:font script="Telu" typeface="Gautami"/>
-        <a:font script="Taml" typeface="Latha"/>
-        <a:font script="Syrc" typeface="Estrangelo Edessa"/>
-        <a:font script="Orya" typeface="Kalinga"/>
-        <a:font script="Mlym" typeface="Kartika"/>
-        <a:font script="Laoo" typeface="DokChampa"/>
-        <a:font script="Sinh" typeface="Iskoola Pota"/>
-        <a:font script="Mong" typeface="Mongolian Baiti"/>
-        <a:font script="Viet" typeface="Times New Roman"/>
-        <a:font script="Uigh" typeface="Microsoft Uighur"/>
-        <a:font script="Geor" typeface="Sylfaen"/>
-      </a:majorFont>
-      <a:minorFont>
-        <a:latin typeface="Calibri"/>
-        <a:ea typeface=""/>
-        <a:cs typeface=""/>
-        <a:font script="Jpan" typeface="ＭＳ Ｐゴシック"/>
-        <a:font script="Hang" typeface="맑은 고딕"/>
-        <a:font script="Hans" typeface="宋体"/>
-        <a:font script="Hant" typeface="新細明體"/>
-        <a:font script="Arab" typeface="Arial"/>
-        <a:font script="Hebr" typeface="Arial"/>
-        <a:font script="Thai" typeface="Cordia New"/>
-        <a:font script="Ethi" typeface="Nyala"/>
-        <a:font script="Beng" typeface="Vrinda"/>
-        <a:font script="Gujr" typeface="Shruti"/>
-        <a:font script="Khmr" typeface="DaunPenh"/>
-        <a:font script="Knda" typeface="Tunga"/>
-        <a:font script="Guru" typeface="Raavi"/>
-        <a:font script="Cans" typeface="Euphemia"/>
-        <a:font script="Cher" typeface="Plantagenet Cherokee"/>
-        <a:font script="Yiii" typeface="Microsoft Yi Baiti"/>
-        <a:font script="Tibt" typeface="Microsoft Himalaya"/>
-        <a:font script="Thaa" typeface="MV Boli"/>
-        <a:font script="Deva" typeface="Mangal"/>
-        <a:font script="Telu" typeface="Gautami"/>
-        <a:font script="Taml" typeface="Latha"/>
-        <a:font script="Syrc" typeface="Estrangelo Edessa"/>
-        <a:font script="Orya" typeface="Kalinga"/>
-        <a:font script="Mlym" typeface="Kartika"/>
-        <a:font script="Laoo" typeface="DokChampa"/>
-        <a:font script="Sinh" typeface="Iskoola Pota"/>
-        <a:font script="Mong" typeface="Mongolian Baiti"/>
-        <a:font script="Viet" typeface="Arial"/>
-        <a:font script="Uigh" typeface="Microsoft Uighur"/>
-        <a:font script="Geor" typeface="Sylfaen"/>
-      </a:minorFont>
-    </a:fontScheme>
-    <a:fmtScheme name="Office">
-      <a:fillStyleLst>
-        <a:solidFill>
-          <a:schemeClr val="phClr"/>
-        </a:solidFill>
-        <a:gradFill rotWithShape="1">
-          <a:gsLst>
-            <a:gs pos="0">
-              <a:schemeClr val="phClr">
-                <a:tint val="50000"/>
-                <a:satMod val="300000"/>
-              </a:schemeClr>
-            </a:gs>
-            <a:gs pos="35000">
-              <a:schemeClr val="phClr">
-                <a:tint val="37000"/>
-                <a:satMod val="300000"/>
-              </a:schemeClr>
-            </a:gs>
-            <a:gs pos="100000">
-              <a:schemeClr val="phClr">
-                <a:tint val="15000"/>
-                <a:satMod val="350000"/>
-              </a:schemeClr>
-            </a:gs>
-          </a:gsLst>
-          <a:lin ang="16200000" scaled="1"/>
-        </a:gradFill>
-        <a:gradFill rotWithShape="1">
-          <a:gsLst>
-            <a:gs pos="0">
-              <a:schemeClr val="phClr">
-                <a:tint val="100000"/>
-                <a:shade val="100000"/>
-                <a:satMod val="130000"/>
-              </a:schemeClr>
-            </a:gs>
-            <a:gs pos="100000">
-              <a:schemeClr val="phClr">
-                <a:tint val="50000"/>
-                <a:shade val="100000"/>
-                <a:satMod val="350000"/>
-              </a:schemeClr>
-            </a:gs>
-          </a:gsLst>
-          <a:lin ang="16200000" scaled="0"/>
-        </a:gradFill>
-      </a:fillStyleLst>
-      <a:lnStyleLst>
-        <a:ln w="9525" cap="flat" cmpd="sng" algn="ctr">
-          <a:solidFill>
-            <a:schemeClr val="phClr">
-              <a:shade val="95000"/>
-              <a:satMod val="105000"/>
-            </a:schemeClr>
-          </a:solidFill>
-          <a:prstDash val="solid"/>
-        </a:ln>
-        <a:ln w="25400" cap="flat" cmpd="sng" algn="ctr">
-          <a:solidFill>
-            <a:schemeClr val="phClr"/>
-          </a:solidFill>
-          <a:prstDash val="solid"/>
-        </a:ln>
-        <a:ln w="38100" cap="flat" cmpd="sng" algn="ctr">
-          <a:solidFill>
-            <a:schemeClr val="phClr"/>
-          </a:solidFill>
-          <a:prstDash val="solid"/>
-        </a:ln>
-      </a:lnStyleLst>
-      <a:effectStyleLst>
-        <a:effectStyle>
-          <a:effectLst>
-            <a:outerShdw blurRad="40000" dist="20000" dir="5400000" rotWithShape="0">
-              <a:srgbClr val="000000">
-                <a:alpha val="38000"/>
-              </a:srgbClr>
-            </a:outerShdw>
-          </a:effectLst>
-        </a:effectStyle>
-        <a:effectStyle>
-          <a:effectLst>
-            <a:outerShdw blurRad="40000" dist="23000" dir="5400000" rotWithShape="0">
-              <a:srgbClr val="000000">
-                <a:alpha val="35000"/>
-              </a:srgbClr>
-            </a:outerShdw>
-          </a:effectLst>
-        </a:effectStyle>
-        <a:effectStyle>
-          <a:effectLst>
-            <a:outerShdw blurRad="40000" dist="23000" dir="5400000" rotWithShape="0">
-              <a:srgbClr val="000000">
-                <a:alpha val="35000"/>
-              </a:srgbClr>
-            </a:outerShdw>
-          </a:effectLst>
-          <a:scene3d>
-            <a:camera prst="orthographicFront">
-              <a:rot lat="0" lon="0" rev="0"/>
-            </a:camera>
-            <a:lightRig rig="threePt" dir="t">
-              <a:rot lat="0" lon="0" rev="1200000"/>
-            </a:lightRig>
-          </a:scene3d>
-          <a:sp3d>
-            <a:bevelT w="63500" h="25400"/>
-          </a:sp3d>
-        </a:effectStyle>
-      </a:effectStyleLst>
-      <a:bgFillStyleLst>
-        <a:solidFill>
-          <a:schemeClr val="phClr"/>
-        </a:solidFill>
-        <a:gradFill rotWithShape="1">
-          <a:gsLst>
-            <a:gs pos="0">
-              <a:schemeClr val="phClr">
-                <a:tint val="40000"/>
-                <a:satMod val="350000"/>
-              </a:schemeClr>
-            </a:gs>
-            <a:gs pos="40000">
-              <a:schemeClr val="phClr">
-                <a:tint val="45000"/>
-                <a:shade val="99000"/>
-                <a:satMod val="350000"/>
-              </a:schemeClr>
-            </a:gs>
-            <a:gs pos="100000">
-              <a:schemeClr val="phClr">
-                <a:shade val="20000"/>
-                <a:satMod val="255000"/>
-              </a:schemeClr>
-            </a:gs>
-          </a:gsLst>
-          <a:path path="circle">
-            <a:fillToRect l="50000" t="-80000" r="50000" b="180000"/>
-          </a:path>
-        </a:gradFill>
-        <a:gradFill rotWithShape="1">
-          <a:gsLst>
-            <a:gs pos="0">
-              <a:schemeClr val="phClr">
-                <a:tint val="80000"/>
-                <a:satMod val="300000"/>
-              </a:schemeClr>
-            </a:gs>
-            <a:gs pos="100000">
-              <a:schemeClr val="phClr">
-                <a:shade val="30000"/>
-                <a:satMod val="200000"/>
-              </a:schemeClr>
-            </a:gs>
-          </a:gsLst>
-          <a:path path="circle">
-            <a:fillToRect l="50000" t="50000" r="50000" b="50000"/>
-          </a:path>
-        </a:gradFill>
-      </a:bgFillStyleLst>
-    </a:fmtScheme>
-  </a:themeElements>
-  <a:objectDefaults>
-    <a:spDef>
-      <a:spPr/>
-      <a:bodyPr/>
-      <a:lstStyle/>
-      <a:style>
-        <a:lnRef idx="1">
-          <a:schemeClr val="accent1"/>
-        </a:lnRef>
-        <a:fillRef idx="3">
-          <a:schemeClr val="accent1"/>
-        </a:fillRef>
-        <a:effectRef idx="2">
-          <a:schemeClr val="accent1"/>
-        </a:effectRef>
-        <a:fontRef idx="minor">
-          <a:schemeClr val="lt1"/>
-        </a:fontRef>
-      </a:style>
-    </a:spDef>
-    <a:lnDef>
-      <a:spPr/>
-      <a:bodyPr/>
-      <a:lstStyle/>
-      <a:style>
-        <a:lnRef idx="2">
-          <a:schemeClr val="accent1"/>
-        </a:lnRef>
-        <a:fillRef idx="0">
-          <a:schemeClr val="accent1"/>
-        </a:fillRef>
-        <a:effectRef idx="1">
-          <a:schemeClr val="accent1"/>
-        </a:effectRef>
-        <a:fontRef idx="minor">
-          <a:schemeClr val="tx1"/>
-        </a:fontRef>
-      </a:style>
-    </a:lnDef>
-  </a:objectDefaults>
-  <a:extraClrSchemeLst/>
-</a:theme>
 </file>